--- a/IRO_Razorpay_Pitch_Deck.pptx
+++ b/IRO_Razorpay_Pitch_Deck.pptx
@@ -511,31 +511,25 @@
           <a:lstStyle/>
           <a:p>
             <a:r>
-              <a:t>A failed payment isn't necessarily a failed transaction. It's a decision problem.</a:t>
+              <a:t>Welcome everyone. We are presenting IRO — the Autonomous AI Teammate for Payment Operations.</a:t>
             </a:r>
           </a:p>
           <a:p/>
           <a:p>
             <a:r>
-              <a:t>Do we retry? Switch the payment route? Ask the customer to take action? Wait for reconciliation? Or stop?</a:t>
+              <a:t>When a payment fails, IRO doesn't just detect the failure. It investigates what happened, reasons about the context, recommends the appropriate recovery path, safely orchestrates the action, and verifies the outcome.</a:t>
             </a:r>
           </a:p>
           <a:p/>
           <a:p>
             <a:r>
-              <a:t>And in payments, the wrong recovery decision can be worse than no recovery at all.</a:t>
+              <a:t>Investigate. Reason. Orchestrate. Verify.</a:t>
             </a:r>
           </a:p>
           <a:p/>
           <a:p>
             <a:r>
-              <a:t>So we built IRO — the Intelligent Recovery Orchestrator.</a:t>
-            </a:r>
-          </a:p>
-          <a:p/>
-          <a:p>
-            <a:r>
-              <a:t>Our first design decision was actually not to use AI everywhere.</a:t>
+              <a:t>Our goal is not to replace payment operations, but to give payment teams an autonomous teammate that makes them faster, safer, and vastly more profitable.</a:t>
             </a:r>
           </a:p>
         </p:txBody>
@@ -605,13 +599,50 @@
           <a:lstStyle/>
           <a:p>
             <a:r>
-              <a:t>IRO — Intelligent Recovery Orchestrator.</a:t>
+              <a:t>Our biggest learning from building IRO is that payment operations isn't just an AI problem.</a:t>
             </a:r>
           </a:p>
           <a:p/>
           <a:p>
             <a:r>
-              <a:t>The system is in charge of the AI, not the AI in charge of the payment system.</a:t>
+              <a:t>It's a reliability problem.</a:t>
+            </a:r>
+          </a:p>
+          <a:p>
+            <a:r>
+              <a:t>A concurrency problem.</a:t>
+            </a:r>
+          </a:p>
+          <a:p>
+            <a:r>
+              <a:t>A policy problem.</a:t>
+            </a:r>
+          </a:p>
+          <a:p>
+            <a:r>
+              <a:t>A cost problem.</a:t>
+            </a:r>
+          </a:p>
+          <a:p>
+            <a:r>
+              <a:t>And only sometimes… an AI problem.</a:t>
+            </a:r>
+          </a:p>
+          <a:p/>
+          <a:p>
+            <a:r>
+              <a:t>AI shouldn't replace payment operations. It should become the teammate that makes them smarter.</a:t>
+            </a:r>
+          </a:p>
+          <a:p/>
+          <a:p>
+            <a:r>
+              <a:t>IRO — The Autonomous AI Teammate for Payment Operations.</a:t>
+            </a:r>
+          </a:p>
+          <a:p>
+            <a:r>
+              <a:t>Investigate. Reason. Orchestrate. Verify.</a:t>
             </a:r>
           </a:p>
           <a:p/>
@@ -687,25 +718,31 @@
           <a:lstStyle/>
           <a:p>
             <a:r>
+              <a:t>A failed payment isn't necessarily a failed transaction. It's a decision problem.</a:t>
+            </a:r>
+          </a:p>
+          <a:p/>
+          <a:p>
+            <a:r>
               <a:t>Do we retry? Switch the payment route? Ask the customer to take action? Wait for reconciliation? Or stop?</a:t>
             </a:r>
           </a:p>
           <a:p/>
           <a:p>
             <a:r>
-              <a:t>And in payments, the wrong recovery decision can be worse than no recovery at all.</a:t>
+              <a:t>The hard problem in payment operations isn't detecting failure. It's deciding what to do next — safely.</a:t>
             </a:r>
           </a:p>
           <a:p/>
           <a:p>
             <a:r>
-              <a:t>Most payment failures are predictable. A transient failure doesn't need an AI model deciding whether to retry.</a:t>
+              <a:t>Traditional automation blindly retries, causing double debits and bank fraud blocks. In payments, the wrong recovery decision can be far worse than no recovery at all.</a:t>
             </a:r>
           </a:p>
           <a:p/>
           <a:p>
             <a:r>
-              <a:t>So IRO uses a decision hierarchy. Deterministic rules handle what we already understand, and AI is introduced only when the recovery decision becomes ambiguous.</a:t>
+              <a:t>IRO investigates the context first, determines the right strategy, checks financial policy, and only then executes safely.</a:t>
             </a:r>
           </a:p>
         </p:txBody>
@@ -775,19 +812,36 @@
           <a:lstStyle/>
           <a:p>
             <a:r>
-              <a:t>So IRO uses a decision hierarchy. Deterministic rules handle what we already understand, and AI is introduced only when the recovery decision becomes ambiguous.</a:t>
+              <a:t>Meet IRO — an autonomous AI teammate for payment operations.</a:t>
             </a:r>
           </a:p>
           <a:p/>
           <a:p>
             <a:r>
-              <a:t>AI proposes. The system decides.</a:t>
+              <a:t>IRO handles the entire lifecycle of an ambiguous payment failure across five core responsibilities: Investigate, Reason, Recommend, Orchestrate, and Verify.</a:t>
             </a:r>
           </a:p>
           <a:p/>
           <a:p>
             <a:r>
-              <a:t>Every AI recommendation passes through deterministic safety guards and a financial policy engine before any recovery action can execute.</a:t>
+              <a:t>When an ambiguous failure arrives, the teammate gathers multi-rail telemetry, reasons through the context, and proposes the optimal recovery path.</a:t>
+            </a:r>
+          </a:p>
+          <a:p/>
+          <a:p>
+            <a:r>
+              <a:t>Here is our most fundamental architectural principle:</a:t>
+            </a:r>
+          </a:p>
+          <a:p/>
+          <a:p>
+            <a:r>
+              <a:t>AI has reasoning authority, not financial authority.</a:t>
+            </a:r>
+          </a:p>
+          <a:p>
+            <a:r>
+              <a:t>The teammate investigates and proposes, but deterministic systems decide whether any action is permitted.</a:t>
             </a:r>
           </a:p>
         </p:txBody>
@@ -857,31 +911,37 @@
           <a:lstStyle/>
           <a:p>
             <a:r>
-              <a:t>The hard part, however, wasn't just AI. It was everything around it.</a:t>
+              <a:t>How does the AI teammate actually work?</a:t>
             </a:r>
           </a:p>
           <a:p/>
           <a:p>
             <a:r>
-              <a:t>First was concurrency.</a:t>
+              <a:t>We equip the agent with six bounded read-only tools: payment context, attempt history, failure taxonomy, customer profile, merchant policy, and real-time route health telemetry.</a:t>
             </a:r>
           </a:p>
           <a:p/>
           <a:p>
             <a:r>
-              <a:t>In an event-driven payment system, the same failure can reach multiple workers. Two workers trying to recover the same payment could potentially create a duplicate financial action.</a:t>
+              <a:t>The agent calls these tools to build a multi-dimensional picture of the failure.</a:t>
             </a:r>
           </a:p>
           <a:p/>
           <a:p>
             <a:r>
-              <a:t>So we use Redis for distributed locking, while the database provides the durable idempotency barrier.</a:t>
+              <a:t>It then performs structured reasoning and outputs a typed recovery recommendation.</a:t>
             </a:r>
           </a:p>
           <a:p/>
           <a:p>
             <a:r>
-              <a:t>In simple terms, Redis answers who can work on this payment now, while the database answers whether this recovery has already happened.</a:t>
+              <a:t>Notice what is absent: there are ZERO write tools.</a:t>
+            </a:r>
+          </a:p>
+          <a:p/>
+          <a:p>
+            <a:r>
+              <a:t>The agent can investigate and recommend, but cannot directly execute payment actions.</a:t>
             </a:r>
           </a:p>
         </p:txBody>
@@ -951,31 +1011,37 @@
           <a:lstStyle/>
           <a:p>
             <a:r>
-              <a:t>The second challenge was that payment state can change while recovery is waiting.</a:t>
+              <a:t>Our core USP is simple: AI proposes. The system decides.</a:t>
             </a:r>
           </a:p>
           <a:p/>
           <a:p>
             <a:r>
-              <a:t>Imagine a payment fails, we schedule a recovery, and then the original payment succeeds.</a:t>
+              <a:t>AI has reasoning authority, not financial authority.</a:t>
             </a:r>
           </a:p>
           <a:p/>
           <a:p>
             <a:r>
-              <a:t>Before execution, IRO revalidates the current payment state. If the payment has already succeeded, the recovery is stopped.</a:t>
+              <a:t>When the agent recommends an action, that recommendation must cross a hard safety boundary.</a:t>
             </a:r>
           </a:p>
           <a:p/>
           <a:p>
             <a:r>
-              <a:t>Another difficult case is a timeout. A timeout doesn't always mean the payment actually failed. The bank could still be processing it. Blindly retrying in that situation could create another financial action.</a:t>
+              <a:t>The financial policy engine independently verifies retry caps, merchant SLAs, and current payment state.</a:t>
             </a:r>
           </a:p>
           <a:p/>
           <a:p>
             <a:r>
-              <a:t>So instead, IRO can hold the recovery and wait for reconciliation.</a:t>
+              <a:t>Redis distributed locks prevent race conditions between workers, and the database idempotency barrier guarantees exactly-once execution.</a:t>
+            </a:r>
+          </a:p>
+          <a:p/>
+          <a:p>
+            <a:r>
+              <a:t>Intelligence handles ambiguity; deterministic systems guarantee safety.</a:t>
             </a:r>
           </a:p>
         </p:txBody>
@@ -1045,19 +1111,31 @@
           <a:lstStyle/>
           <a:p>
             <a:r>
-              <a:t>And finally, once AI becomes part of the architecture, AI itself becomes an infrastructure problem.</a:t>
+              <a:t>Rather than a generic technology logo dump, we organized our tech stack by architectural responsibility.</a:t>
             </a:r>
           </a:p>
           <a:p/>
           <a:p>
             <a:r>
-              <a:t>We use tiered model routing and an L7 load balancer so that simpler cases can use lightweight inference, while complex cases are routed to deeper reasoning capacity.</a:t>
+              <a:t>Kafka serves as our decoupled event backbone. FastAPI and Python 3.12 provide the async non-blocking application core.</a:t>
             </a:r>
           </a:p>
           <a:p/>
           <a:p>
             <a:r>
-              <a:t>The goal isn't to use more AI. It's to use exactly as much intelligence as the decision requires.</a:t>
+              <a:t>PostgreSQL maintains transactional state and immutable audit traces. Redis coordinates distributed locking to prevent worker race conditions.</a:t>
+            </a:r>
+          </a:p>
+          <a:p/>
+          <a:p>
+            <a:r>
+              <a:t>Our AI teammate is served through a tiered model gateway with L7 load balancing.</a:t>
+            </a:r>
+          </a:p>
+          <a:p/>
+          <a:p>
+            <a:r>
+              <a:t>And our deterministic policy engine enforces hard safety invariants. All validated across 120 automated tests.</a:t>
             </a:r>
           </a:p>
         </p:txBody>
@@ -1127,49 +1205,43 @@
           <a:lstStyle/>
           <a:p>
             <a:r>
-              <a:t>Now let's see how this works in an actual recovery case.</a:t>
+              <a:t>Now let's see how this works in an actual scenario.</a:t>
             </a:r>
           </a:p>
           <a:p/>
           <a:p>
             <a:r>
-              <a:t>Imagine a seventy-five-thousand-rupee credit card payment that failed because its payment route has degraded, after multiple attempts.</a:t>
+              <a:t>Imagine a seventy-five-thousand-rupee credit card payment that failed because its payment route degraded after multiple attempts.</a:t>
             </a:r>
           </a:p>
           <a:p/>
           <a:p>
             <a:r>
-              <a:t>This isn't a straightforward retry anymore. IRO detects the ambiguity and sends the case to its specialist investigation layer.</a:t>
+              <a:t>This isn't a simple retry. IRO detects the ambiguity and sends the case to its investigation layer.</a:t>
             </a:r>
           </a:p>
           <a:p/>
           <a:p>
             <a:r>
-              <a:t>The agent can inspect the payment history, previous attempts, route health, and merchant recovery policy, but it has no write access to the payment system.</a:t>
+              <a:t>The agent inspects the history, previous attempts, route health, and merchant policy.</a:t>
             </a:r>
           </a:p>
           <a:p/>
           <a:p>
             <a:r>
-              <a:t>Based on that evidence, the AI recommends switching to a healthier payment route. But that recommendation is not execution.</a:t>
+              <a:t>It discovers the primary route is at 38% health, but an alternate route is at 98%. It recommends switching routes.</a:t>
             </a:r>
           </a:p>
           <a:p/>
           <a:p>
             <a:r>
-              <a:t>The financial policy engine independently checks the retry limits, recovery window, merchant policy, permitted strategy, and current payment state.</a:t>
+              <a:t>The financial policy engine verifies all limits and state. The lock is acquired, idempotency reserved, and the payment is recovered.</a:t>
             </a:r>
           </a:p>
           <a:p/>
           <a:p>
             <a:r>
-              <a:t>Only after those checks pass can execution happen. The concurrency lock is acquired, idempotency is reserved, and the recovery is executed.</a:t>
-            </a:r>
-          </a:p>
-          <a:p/>
-          <a:p>
-            <a:r>
-              <a:t>That's the difference between an AI agent acting on a payment and a payment system safely using AI.</a:t>
+              <a:t>That is the difference between blindly retrying and having an intelligent teammate.</a:t>
             </a:r>
           </a:p>
         </p:txBody>
@@ -1239,31 +1311,31 @@
           <a:lstStyle/>
           <a:p>
             <a:r>
-              <a:t>We then evaluated IRO across one hundred controlled synthetic payment scenarios.</a:t>
+              <a:t>We evaluated IRO across one hundred controlled synthetic payment scenarios.</a:t>
             </a:r>
           </a:p>
           <a:p/>
           <a:p>
             <a:r>
-              <a:t>IRO achieved a 57 percent overall recovery rate, compared with 32 percent for our transparent naive single-rail baseline.</a:t>
+              <a:t>The results speak for themselves: IRO achieved a 57 percent overall recovery rate, compared with 32 percent for the naive baseline.</a:t>
             </a:r>
           </a:p>
           <a:p/>
           <a:p>
             <a:r>
-              <a:t>That resulted in two hundred and thirty-one thousand and sixty-nine rupees of simulated recovered revenue, compared with one hundred and forty-seven thousand six hundred and fifty-seven rupees for the baseline.</a:t>
+              <a:t>That generated two hundred and thirty-one thousand rupees of recovered revenue, an incremental gain of over eighty-three thousand rupees.</a:t>
             </a:r>
           </a:p>
           <a:p/>
           <a:p>
             <a:r>
-              <a:t>And importantly, IRO executed zero unsafe actions while blocking twenty-four simulated unsafe recovery attempts.</a:t>
+              <a:t>And most importantly: IRO executed zero unsafe actions while blocking twenty-four simulated violations.</a:t>
             </a:r>
           </a:p>
           <a:p/>
           <a:p>
             <a:r>
-              <a:t>These are synthetic results, not real Razorpay transaction outcomes.</a:t>
+              <a:t>Total AI cost: just twenty-eight rupees, representing a 2,920x ROI.</a:t>
             </a:r>
           </a:p>
         </p:txBody>
@@ -1333,50 +1405,31 @@
           <a:lstStyle/>
           <a:p>
             <a:r>
-              <a:t>Our biggest learning from building IRO was that payment recovery isn't just an AI problem.</a:t>
+              <a:t>Our business model positions IRO as B2B fintech infrastructure for banks, payment aggregators, and enterprise merchants.</a:t>
             </a:r>
           </a:p>
           <a:p/>
           <a:p>
             <a:r>
-              <a:t>It's a reliability problem.</a:t>
-            </a:r>
-          </a:p>
-          <a:p>
-            <a:r>
-              <a:t>A concurrency problem.</a:t>
-            </a:r>
-          </a:p>
-          <a:p>
-            <a:r>
-              <a:t>A policy problem.</a:t>
-            </a:r>
-          </a:p>
-          <a:p>
-            <a:r>
-              <a:t>A cost problem.</a:t>
-            </a:r>
-          </a:p>
-          <a:p>
-            <a:r>
-              <a:t>And only sometimes… an AI problem.</a:t>
+              <a:t>It combines an annual platform license with usage-based pricing for recovered volume.</a:t>
             </a:r>
           </a:p>
           <a:p/>
           <a:p>
             <a:r>
-              <a:t>We didn't build an AI that controls payments.</a:t>
-            </a:r>
-          </a:p>
-          <a:p>
-            <a:r>
-              <a:t>We built a payment recovery system that knows when AI is worth using.</a:t>
+              <a:t>The value proposition is clear: recovered revenue, reduced operational workload, and zero unsafe automations.</a:t>
             </a:r>
           </a:p>
           <a:p/>
           <a:p>
             <a:r>
-              <a:t>IRO — Intelligent Recovery Orchestrator.</a:t>
+              <a:t>Today, IRO masters payment failure investigation and recovery.</a:t>
+            </a:r>
+          </a:p>
+          <a:p/>
+          <a:p>
+            <a:r>
+              <a:t>Tomorrow, this autonomous teammate can expand into reconciliation, route rebalancing, and operational dispute management.</a:t>
             </a:r>
           </a:p>
         </p:txBody>
@@ -4433,8 +4486,8 @@
         </p:nvSpPr>
         <p:spPr>
           <a:xfrm>
-            <a:off x="731520" y="1097280"/>
-            <a:ext cx="4114800" cy="384048"/>
+            <a:off x="731520" y="822960"/>
+            <a:ext cx="5120640" cy="384048"/>
           </a:xfrm>
           <a:prstGeom prst="roundRect">
             <a:avLst/>
@@ -4463,19 +4516,19 @@
           </a:fontRef>
         </p:style>
         <p:txBody>
-          <a:bodyPr rtlCol="0" anchor="ctr" lIns="137160"/>
+          <a:bodyPr rtlCol="0" anchor="ctr" lIns="164592"/>
           <a:lstStyle/>
           <a:p>
             <a:pPr algn="ctr">
-              <a:defRPr sz="1000" b="1">
-                <a:solidFill>
-                  <a:srgbClr val="60A5FA"/>
-                </a:solidFill>
-                <a:latin typeface="Segoe UI"/>
-              </a:defRPr>
-            </a:pPr>
-            <a:r>
-              <a:t>RAZORPAY AI BUILDATHON 2026 • TRACK 3</a:t>
+              <a:defRPr sz="950" b="1">
+                <a:solidFill>
+                  <a:srgbClr val="06B6D4"/>
+                </a:solidFill>
+                <a:latin typeface="Segoe UI"/>
+              </a:defRPr>
+            </a:pPr>
+            <a:r>
+              <a:t>RAZORPAY AI BUILDATHON 2026 • TRACK 3: AUTONOMOUS AI TEAMMATES</a:t>
             </a:r>
           </a:p>
         </p:txBody>
@@ -4488,8 +4541,8 @@
         </p:nvSpPr>
         <p:spPr>
           <a:xfrm>
-            <a:off x="731520" y="1645920"/>
-            <a:ext cx="10698480" cy="1097280"/>
+            <a:off x="731520" y="1325880"/>
+            <a:ext cx="10698480" cy="1005840"/>
           </a:xfrm>
           <a:prstGeom prst="rect">
             <a:avLst/>
@@ -4503,7 +4556,7 @@
           <a:lstStyle/>
           <a:p>
             <a:pPr>
-              <a:defRPr sz="3800" b="1">
+              <a:defRPr sz="4400" b="1">
                 <a:solidFill>
                   <a:srgbClr val="FFFFFF"/>
                 </a:solidFill>
@@ -4511,7 +4564,20 @@
               </a:defRPr>
             </a:pPr>
             <a:r>
-              <a:t>Intelligent Recovery Orchestrator</a:t>
+              <a:t>IRO</a:t>
+            </a:r>
+          </a:p>
+          <a:p>
+            <a:pPr>
+              <a:defRPr sz="2400" b="1">
+                <a:solidFill>
+                  <a:srgbClr val="60A5FA"/>
+                </a:solidFill>
+                <a:latin typeface="Segoe UI"/>
+              </a:defRPr>
+            </a:pPr>
+            <a:r>
+              <a:t>The Autonomous AI Teammate for Payment Operations</a:t>
             </a:r>
           </a:p>
         </p:txBody>
@@ -4524,8 +4590,8 @@
         </p:nvSpPr>
         <p:spPr>
           <a:xfrm>
-            <a:off x="731520" y="2651760"/>
-            <a:ext cx="9601200" cy="731520"/>
+            <a:off x="731520" y="2514600"/>
+            <a:ext cx="10698480" cy="411480"/>
           </a:xfrm>
           <a:prstGeom prst="rect">
             <a:avLst/>
@@ -4539,15 +4605,15 @@
           <a:lstStyle/>
           <a:p>
             <a:pPr>
-              <a:defRPr sz="1500">
-                <a:solidFill>
-                  <a:srgbClr val="94A3B8"/>
-                </a:solidFill>
-                <a:latin typeface="Segoe UI"/>
-              </a:defRPr>
-            </a:pPr>
-            <a:r>
-              <a:t>A distributed revenue-recovery system that detects failed payments, safely orchestrates recovery strategies, and knows when AI is worth using.</a:t>
+              <a:defRPr sz="1400" b="1">
+                <a:solidFill>
+                  <a:srgbClr val="06B6D4"/>
+                </a:solidFill>
+                <a:latin typeface="Consolas"/>
+              </a:defRPr>
+            </a:pPr>
+            <a:r>
+              <a:t>Investigate.  Reason.  Orchestrate.  Verify.</a:t>
             </a:r>
           </a:p>
         </p:txBody>
@@ -4560,8 +4626,102 @@
         </p:nvSpPr>
         <p:spPr>
           <a:xfrm>
-            <a:off x="731520" y="3749039"/>
-            <a:ext cx="2468880" cy="1371600"/>
+            <a:off x="731520" y="3063240"/>
+            <a:ext cx="10698480" cy="1097280"/>
+          </a:xfrm>
+          <a:prstGeom prst="roundRect">
+            <a:avLst/>
+          </a:prstGeom>
+          <a:solidFill>
+            <a:srgbClr val="132247"/>
+          </a:solidFill>
+          <a:ln w="12700">
+            <a:solidFill>
+              <a:srgbClr val="3B82F6"/>
+            </a:solidFill>
+          </a:ln>
+        </p:spPr>
+        <p:style>
+          <a:lnRef idx="1">
+            <a:schemeClr val="accent1"/>
+          </a:lnRef>
+          <a:fillRef idx="3">
+            <a:schemeClr val="accent1"/>
+          </a:fillRef>
+          <a:effectRef idx="2">
+            <a:schemeClr val="accent1"/>
+          </a:effectRef>
+          <a:fontRef idx="minor">
+            <a:schemeClr val="lt1"/>
+          </a:fontRef>
+        </p:style>
+        <p:txBody>
+          <a:bodyPr rtlCol="0" anchor="ctr"/>
+          <a:lstStyle/>
+          <a:p>
+            <a:pPr algn="ctr"/>
+          </a:p>
+        </p:txBody>
+      </p:sp>
+      <p:sp>
+        <p:nvSpPr>
+          <p:cNvPr id="7" name="TextBox 6"/>
+          <p:cNvSpPr txBox="1"/>
+          <p:nvPr/>
+        </p:nvSpPr>
+        <p:spPr>
+          <a:xfrm>
+            <a:off x="1005840" y="3154680"/>
+            <a:ext cx="10149840" cy="914400"/>
+          </a:xfrm>
+          <a:prstGeom prst="rect">
+            <a:avLst/>
+          </a:prstGeom>
+          <a:noFill/>
+        </p:spPr>
+        <p:txBody>
+          <a:bodyPr wrap="none">
+            <a:spAutoFit/>
+          </a:bodyPr>
+          <a:lstStyle/>
+          <a:p>
+            <a:pPr>
+              <a:defRPr sz="1000" b="1">
+                <a:solidFill>
+                  <a:srgbClr val="60A5FA"/>
+                </a:solidFill>
+                <a:latin typeface="Segoe UI"/>
+              </a:defRPr>
+            </a:pPr>
+            <a:r>
+              <a:t>CORE POSITIONING</a:t>
+            </a:r>
+          </a:p>
+          <a:p>
+            <a:pPr>
+              <a:defRPr sz="1200" i="1">
+                <a:solidFill>
+                  <a:srgbClr val="FFFFFF"/>
+                </a:solidFill>
+                <a:latin typeface="Segoe UI"/>
+              </a:defRPr>
+            </a:pPr>
+            <a:r>
+              <a:t>“When a payment fails, IRO doesn't just detect the failure. It investigates what happened, reasons about the context, recommends the appropriate recovery path, safely orchestrates the action, and verifies the outcome.”</a:t>
+            </a:r>
+          </a:p>
+        </p:txBody>
+      </p:sp>
+      <p:sp>
+        <p:nvSpPr>
+          <p:cNvPr id="8" name="Rounded Rectangle 7"/>
+          <p:cNvSpPr/>
+          <p:nvPr/>
+        </p:nvSpPr>
+        <p:spPr>
+          <a:xfrm>
+            <a:off x="731520" y="4343400"/>
+            <a:ext cx="2468880" cy="1188720"/>
           </a:xfrm>
           <a:prstGeom prst="roundRect">
             <a:avLst/>
@@ -4599,14 +4759,14 @@
       </p:sp>
       <p:sp>
         <p:nvSpPr>
-          <p:cNvPr id="7" name="TextBox 6"/>
+          <p:cNvPr id="9" name="TextBox 8"/>
           <p:cNvSpPr txBox="1"/>
           <p:nvPr/>
         </p:nvSpPr>
         <p:spPr>
           <a:xfrm>
-            <a:off x="914400" y="3913631"/>
-            <a:ext cx="2103120" cy="457200"/>
+            <a:off x="896112" y="4453128"/>
+            <a:ext cx="2139696" cy="411480"/>
           </a:xfrm>
           <a:prstGeom prst="rect">
             <a:avLst/>
@@ -4620,7 +4780,7 @@
           <a:lstStyle/>
           <a:p>
             <a:pPr>
-              <a:defRPr sz="2200" b="1">
+              <a:defRPr sz="2000" b="1">
                 <a:solidFill>
                   <a:srgbClr val="10B981"/>
                 </a:solidFill>
@@ -4635,14 +4795,14 @@
       </p:sp>
       <p:sp>
         <p:nvSpPr>
-          <p:cNvPr id="8" name="TextBox 7"/>
+          <p:cNvPr id="10" name="TextBox 9"/>
           <p:cNvSpPr txBox="1"/>
           <p:nvPr/>
         </p:nvSpPr>
         <p:spPr>
           <a:xfrm>
-            <a:off x="914400" y="4407407"/>
-            <a:ext cx="2103120" cy="274320"/>
+            <a:off x="896112" y="4873752"/>
+            <a:ext cx="2139696" cy="274320"/>
           </a:xfrm>
           <a:prstGeom prst="rect">
             <a:avLst/>
@@ -4656,7 +4816,7 @@
           <a:lstStyle/>
           <a:p>
             <a:pPr>
-              <a:defRPr sz="1000" b="1">
+              <a:defRPr sz="950" b="1">
                 <a:solidFill>
                   <a:srgbClr val="FFFFFF"/>
                 </a:solidFill>
@@ -4671,14 +4831,14 @@
       </p:sp>
       <p:sp>
         <p:nvSpPr>
-          <p:cNvPr id="9" name="TextBox 8"/>
+          <p:cNvPr id="11" name="TextBox 10"/>
           <p:cNvSpPr txBox="1"/>
           <p:nvPr/>
         </p:nvSpPr>
         <p:spPr>
           <a:xfrm>
-            <a:off x="914400" y="4681727"/>
-            <a:ext cx="2103120" cy="274320"/>
+            <a:off x="896112" y="5148072"/>
+            <a:ext cx="2139696" cy="274320"/>
           </a:xfrm>
           <a:prstGeom prst="rect">
             <a:avLst/>
@@ -4692,7 +4852,7 @@
           <a:lstStyle/>
           <a:p>
             <a:pPr>
-              <a:defRPr sz="900">
+              <a:defRPr sz="850">
                 <a:solidFill>
                   <a:srgbClr val="64748B"/>
                 </a:solidFill>
@@ -4700,21 +4860,21 @@
               </a:defRPr>
             </a:pPr>
             <a:r>
-              <a:t>vs 32.0% Baseline</a:t>
-            </a:r>
-          </a:p>
-        </p:txBody>
-      </p:sp>
-      <p:sp>
-        <p:nvSpPr>
-          <p:cNvPr id="10" name="Rounded Rectangle 9"/>
+              <a:t>vs 32.0% Baseline (+78% lift)</a:t>
+            </a:r>
+          </a:p>
+        </p:txBody>
+      </p:sp>
+      <p:sp>
+        <p:nvSpPr>
+          <p:cNvPr id="12" name="Rounded Rectangle 11"/>
           <p:cNvSpPr/>
           <p:nvPr/>
         </p:nvSpPr>
         <p:spPr>
           <a:xfrm>
-            <a:off x="3474720" y="3749039"/>
-            <a:ext cx="2468880" cy="1371600"/>
+            <a:off x="3474720" y="4343400"/>
+            <a:ext cx="2468880" cy="1188720"/>
           </a:xfrm>
           <a:prstGeom prst="roundRect">
             <a:avLst/>
@@ -4752,14 +4912,14 @@
       </p:sp>
       <p:sp>
         <p:nvSpPr>
-          <p:cNvPr id="11" name="TextBox 10"/>
+          <p:cNvPr id="13" name="TextBox 12"/>
           <p:cNvSpPr txBox="1"/>
           <p:nvPr/>
         </p:nvSpPr>
         <p:spPr>
           <a:xfrm>
-            <a:off x="3657600" y="3913631"/>
-            <a:ext cx="2103120" cy="457200"/>
+            <a:off x="3639312" y="4453128"/>
+            <a:ext cx="2139696" cy="411480"/>
           </a:xfrm>
           <a:prstGeom prst="rect">
             <a:avLst/>
@@ -4773,7 +4933,7 @@
           <a:lstStyle/>
           <a:p>
             <a:pPr>
-              <a:defRPr sz="2200" b="1">
+              <a:defRPr sz="2000" b="1">
                 <a:solidFill>
                   <a:srgbClr val="60A5FA"/>
                 </a:solidFill>
@@ -4788,14 +4948,14 @@
       </p:sp>
       <p:sp>
         <p:nvSpPr>
-          <p:cNvPr id="12" name="TextBox 11"/>
+          <p:cNvPr id="14" name="TextBox 13"/>
           <p:cNvSpPr txBox="1"/>
           <p:nvPr/>
         </p:nvSpPr>
         <p:spPr>
           <a:xfrm>
-            <a:off x="3657600" y="4407407"/>
-            <a:ext cx="2103120" cy="274320"/>
+            <a:off x="3639312" y="4873752"/>
+            <a:ext cx="2139696" cy="274320"/>
           </a:xfrm>
           <a:prstGeom prst="rect">
             <a:avLst/>
@@ -4809,7 +4969,7 @@
           <a:lstStyle/>
           <a:p>
             <a:pPr>
-              <a:defRPr sz="1000" b="1">
+              <a:defRPr sz="950" b="1">
                 <a:solidFill>
                   <a:srgbClr val="FFFFFF"/>
                 </a:solidFill>
@@ -4817,21 +4977,21 @@
               </a:defRPr>
             </a:pPr>
             <a:r>
-              <a:t>REVENUE SAVED</a:t>
-            </a:r>
-          </a:p>
-        </p:txBody>
-      </p:sp>
-      <p:sp>
-        <p:nvSpPr>
-          <p:cNvPr id="13" name="TextBox 12"/>
+              <a:t>REVENUE RECOVERED</a:t>
+            </a:r>
+          </a:p>
+        </p:txBody>
+      </p:sp>
+      <p:sp>
+        <p:nvSpPr>
+          <p:cNvPr id="15" name="TextBox 14"/>
           <p:cNvSpPr txBox="1"/>
           <p:nvPr/>
         </p:nvSpPr>
         <p:spPr>
           <a:xfrm>
-            <a:off x="3657600" y="4681727"/>
-            <a:ext cx="2103120" cy="274320"/>
+            <a:off x="3639312" y="5148072"/>
+            <a:ext cx="2139696" cy="274320"/>
           </a:xfrm>
           <a:prstGeom prst="rect">
             <a:avLst/>
@@ -4845,7 +5005,7 @@
           <a:lstStyle/>
           <a:p>
             <a:pPr>
-              <a:defRPr sz="900">
+              <a:defRPr sz="850">
                 <a:solidFill>
                   <a:srgbClr val="64748B"/>
                 </a:solidFill>
@@ -4853,21 +5013,21 @@
               </a:defRPr>
             </a:pPr>
             <a:r>
-              <a:t>+₹83,412 Net Lift</a:t>
-            </a:r>
-          </a:p>
-        </p:txBody>
-      </p:sp>
-      <p:sp>
-        <p:nvSpPr>
-          <p:cNvPr id="14" name="Rounded Rectangle 13"/>
+              <a:t>+₹83,412 net gain</a:t>
+            </a:r>
+          </a:p>
+        </p:txBody>
+      </p:sp>
+      <p:sp>
+        <p:nvSpPr>
+          <p:cNvPr id="16" name="Rounded Rectangle 15"/>
           <p:cNvSpPr/>
           <p:nvPr/>
         </p:nvSpPr>
         <p:spPr>
           <a:xfrm>
-            <a:off x="6217920" y="3749039"/>
-            <a:ext cx="2468880" cy="1371600"/>
+            <a:off x="6217920" y="4343400"/>
+            <a:ext cx="2468880" cy="1188720"/>
           </a:xfrm>
           <a:prstGeom prst="roundRect">
             <a:avLst/>
@@ -4905,14 +5065,14 @@
       </p:sp>
       <p:sp>
         <p:nvSpPr>
-          <p:cNvPr id="15" name="TextBox 14"/>
+          <p:cNvPr id="17" name="TextBox 16"/>
           <p:cNvSpPr txBox="1"/>
           <p:nvPr/>
         </p:nvSpPr>
         <p:spPr>
           <a:xfrm>
-            <a:off x="6400800" y="3913631"/>
-            <a:ext cx="2103120" cy="457200"/>
+            <a:off x="6382512" y="4453128"/>
+            <a:ext cx="2139696" cy="411480"/>
           </a:xfrm>
           <a:prstGeom prst="rect">
             <a:avLst/>
@@ -4926,7 +5086,7 @@
           <a:lstStyle/>
           <a:p>
             <a:pPr>
-              <a:defRPr sz="2200" b="1">
+              <a:defRPr sz="2000" b="1">
                 <a:solidFill>
                   <a:srgbClr val="06B6D4"/>
                 </a:solidFill>
@@ -4941,14 +5101,14 @@
       </p:sp>
       <p:sp>
         <p:nvSpPr>
-          <p:cNvPr id="16" name="TextBox 15"/>
+          <p:cNvPr id="18" name="TextBox 17"/>
           <p:cNvSpPr txBox="1"/>
           <p:nvPr/>
         </p:nvSpPr>
         <p:spPr>
           <a:xfrm>
-            <a:off x="6400800" y="4407407"/>
-            <a:ext cx="2103120" cy="274320"/>
+            <a:off x="6382512" y="4873752"/>
+            <a:ext cx="2139696" cy="274320"/>
           </a:xfrm>
           <a:prstGeom prst="rect">
             <a:avLst/>
@@ -4962,7 +5122,7 @@
           <a:lstStyle/>
           <a:p>
             <a:pPr>
-              <a:defRPr sz="1000" b="1">
+              <a:defRPr sz="950" b="1">
                 <a:solidFill>
                   <a:srgbClr val="FFFFFF"/>
                 </a:solidFill>
@@ -4977,14 +5137,14 @@
       </p:sp>
       <p:sp>
         <p:nvSpPr>
-          <p:cNvPr id="17" name="TextBox 16"/>
+          <p:cNvPr id="19" name="TextBox 18"/>
           <p:cNvSpPr txBox="1"/>
           <p:nvPr/>
         </p:nvSpPr>
         <p:spPr>
           <a:xfrm>
-            <a:off x="6400800" y="4681727"/>
-            <a:ext cx="2103120" cy="274320"/>
+            <a:off x="6382512" y="5148072"/>
+            <a:ext cx="2139696" cy="274320"/>
           </a:xfrm>
           <a:prstGeom prst="rect">
             <a:avLst/>
@@ -4998,7 +5158,7 @@
           <a:lstStyle/>
           <a:p>
             <a:pPr>
-              <a:defRPr sz="900">
+              <a:defRPr sz="850">
                 <a:solidFill>
                   <a:srgbClr val="64748B"/>
                 </a:solidFill>
@@ -5006,21 +5166,21 @@
               </a:defRPr>
             </a:pPr>
             <a:r>
-              <a:t>24 Attempts Blocked</a:t>
-            </a:r>
-          </a:p>
-        </p:txBody>
-      </p:sp>
-      <p:sp>
-        <p:nvSpPr>
-          <p:cNvPr id="18" name="Rounded Rectangle 17"/>
+              <a:t>24 attempts blocked safely</a:t>
+            </a:r>
+          </a:p>
+        </p:txBody>
+      </p:sp>
+      <p:sp>
+        <p:nvSpPr>
+          <p:cNvPr id="20" name="Rounded Rectangle 19"/>
           <p:cNvSpPr/>
           <p:nvPr/>
         </p:nvSpPr>
         <p:spPr>
           <a:xfrm>
-            <a:off x="8961120" y="3749039"/>
-            <a:ext cx="2468880" cy="1371600"/>
+            <a:off x="8961120" y="4343400"/>
+            <a:ext cx="2468880" cy="1188720"/>
           </a:xfrm>
           <a:prstGeom prst="roundRect">
             <a:avLst/>
@@ -5058,14 +5218,14 @@
       </p:sp>
       <p:sp>
         <p:nvSpPr>
-          <p:cNvPr id="19" name="TextBox 18"/>
+          <p:cNvPr id="21" name="TextBox 20"/>
           <p:cNvSpPr txBox="1"/>
           <p:nvPr/>
         </p:nvSpPr>
         <p:spPr>
           <a:xfrm>
-            <a:off x="9144000" y="3913631"/>
-            <a:ext cx="2103120" cy="457200"/>
+            <a:off x="9125712" y="4453128"/>
+            <a:ext cx="2139696" cy="411480"/>
           </a:xfrm>
           <a:prstGeom prst="rect">
             <a:avLst/>
@@ -5079,7 +5239,7 @@
           <a:lstStyle/>
           <a:p>
             <a:pPr>
-              <a:defRPr sz="2200" b="1">
+              <a:defRPr sz="2000" b="1">
                 <a:solidFill>
                   <a:srgbClr val="F59E0B"/>
                 </a:solidFill>
@@ -5094,14 +5254,14 @@
       </p:sp>
       <p:sp>
         <p:nvSpPr>
-          <p:cNvPr id="20" name="TextBox 19"/>
+          <p:cNvPr id="22" name="TextBox 21"/>
           <p:cNvSpPr txBox="1"/>
           <p:nvPr/>
         </p:nvSpPr>
         <p:spPr>
           <a:xfrm>
-            <a:off x="9144000" y="4407407"/>
-            <a:ext cx="2103120" cy="274320"/>
+            <a:off x="9125712" y="4873752"/>
+            <a:ext cx="2139696" cy="274320"/>
           </a:xfrm>
           <a:prstGeom prst="rect">
             <a:avLst/>
@@ -5115,7 +5275,7 @@
           <a:lstStyle/>
           <a:p>
             <a:pPr>
-              <a:defRPr sz="1000" b="1">
+              <a:defRPr sz="950" b="1">
                 <a:solidFill>
                   <a:srgbClr val="FFFFFF"/>
                 </a:solidFill>
@@ -5130,14 +5290,14 @@
       </p:sp>
       <p:sp>
         <p:nvSpPr>
-          <p:cNvPr id="21" name="TextBox 20"/>
+          <p:cNvPr id="23" name="TextBox 22"/>
           <p:cNvSpPr txBox="1"/>
           <p:nvPr/>
         </p:nvSpPr>
         <p:spPr>
           <a:xfrm>
-            <a:off x="9144000" y="4681727"/>
-            <a:ext cx="2103120" cy="274320"/>
+            <a:off x="9125712" y="5148072"/>
+            <a:ext cx="2139696" cy="274320"/>
           </a:xfrm>
           <a:prstGeom prst="rect">
             <a:avLst/>
@@ -5151,7 +5311,7 @@
           <a:lstStyle/>
           <a:p>
             <a:pPr>
-              <a:defRPr sz="900">
+              <a:defRPr sz="850">
                 <a:solidFill>
                   <a:srgbClr val="64748B"/>
                 </a:solidFill>
@@ -5159,14 +5319,14 @@
               </a:defRPr>
             </a:pPr>
             <a:r>
-              <a:t>₹28.56 Total AI Cost</a:t>
-            </a:r>
-          </a:p>
-        </p:txBody>
-      </p:sp>
-      <p:sp>
-        <p:nvSpPr>
-          <p:cNvPr id="22" name="TextBox 21"/>
+              <a:t>₹28.56 total inference cost</a:t>
+            </a:r>
+          </a:p>
+        </p:txBody>
+      </p:sp>
+      <p:sp>
+        <p:nvSpPr>
+          <p:cNvPr id="24" name="TextBox 23"/>
           <p:cNvSpPr txBox="1"/>
           <p:nvPr/>
         </p:nvSpPr>
@@ -5187,7 +5347,7 @@
           <a:lstStyle/>
           <a:p>
             <a:pPr>
-              <a:defRPr sz="1100">
+              <a:defRPr sz="1050">
                 <a:solidFill>
                   <a:srgbClr val="64748B"/>
                 </a:solidFill>
@@ -5195,7 +5355,7 @@
               </a:defRPr>
             </a:pPr>
             <a:r>
-              <a:t>Built by Om Dapke  •  FastAPI + PostgreSQL + Redis Locks + Kafka Architecture + Multi-Tier AI Gateway</a:t>
+              <a:t>Built by Om Dapke  •  github.com/omdapke01/intelligent-recovery-orchestrator  •  120 / 120 Pytest Passing</a:t>
             </a:r>
           </a:p>
         </p:txBody>
@@ -5263,254 +5423,20 @@
       </p:sp>
       <p:sp>
         <p:nvSpPr>
-          <p:cNvPr id="3" name="TextBox 2"/>
-          <p:cNvSpPr txBox="1"/>
-          <p:nvPr/>
-        </p:nvSpPr>
-        <p:spPr>
-          <a:xfrm>
-            <a:off x="731520" y="365760"/>
-            <a:ext cx="10698480" cy="320040"/>
-          </a:xfrm>
-          <a:prstGeom prst="rect">
-            <a:avLst/>
-          </a:prstGeom>
-          <a:noFill/>
-        </p:spPr>
-        <p:txBody>
-          <a:bodyPr wrap="square" lIns="0" tIns="0" rIns="0" bIns="0">
-            <a:spAutoFit/>
-          </a:bodyPr>
-          <a:lstStyle/>
-          <a:p>
-            <a:pPr>
-              <a:defRPr sz="1000" b="1">
-                <a:solidFill>
-                  <a:srgbClr val="06B6D4"/>
-                </a:solidFill>
-                <a:latin typeface="Segoe UI"/>
-              </a:defRPr>
-            </a:pPr>
-            <a:r>
-              <a:t>09. CONCLUSION</a:t>
-            </a:r>
-          </a:p>
-        </p:txBody>
-      </p:sp>
-      <p:sp>
-        <p:nvSpPr>
-          <p:cNvPr id="4" name="TextBox 3"/>
-          <p:cNvSpPr txBox="1"/>
-          <p:nvPr/>
-        </p:nvSpPr>
-        <p:spPr>
-          <a:xfrm>
-            <a:off x="731520" y="658368"/>
-            <a:ext cx="10698480" cy="502920"/>
-          </a:xfrm>
-          <a:prstGeom prst="rect">
-            <a:avLst/>
-          </a:prstGeom>
-          <a:noFill/>
-        </p:spPr>
-        <p:txBody>
-          <a:bodyPr wrap="square" lIns="0" tIns="0" rIns="0" bIns="0">
-            <a:spAutoFit/>
-          </a:bodyPr>
-          <a:lstStyle/>
-          <a:p>
-            <a:pPr>
-              <a:defRPr sz="2200" b="1">
-                <a:solidFill>
-                  <a:srgbClr val="FFFFFF"/>
-                </a:solidFill>
-                <a:latin typeface="Segoe UI"/>
-              </a:defRPr>
-            </a:pPr>
-            <a:r>
-              <a:t>IRO: Production-Grade Revenue Recovery</a:t>
-            </a:r>
-          </a:p>
-        </p:txBody>
-      </p:sp>
-      <p:sp>
-        <p:nvSpPr>
-          <p:cNvPr id="5" name="TextBox 4"/>
-          <p:cNvSpPr txBox="1"/>
-          <p:nvPr/>
-        </p:nvSpPr>
-        <p:spPr>
-          <a:xfrm>
-            <a:off x="731520" y="1188720"/>
-            <a:ext cx="10698480" cy="320040"/>
-          </a:xfrm>
-          <a:prstGeom prst="rect">
-            <a:avLst/>
-          </a:prstGeom>
-          <a:noFill/>
-        </p:spPr>
-        <p:txBody>
-          <a:bodyPr wrap="square" lIns="0" tIns="0" rIns="0" bIns="0">
-            <a:spAutoFit/>
-          </a:bodyPr>
-          <a:lstStyle/>
-          <a:p>
-            <a:pPr>
-              <a:defRPr sz="1200">
-                <a:solidFill>
-                  <a:srgbClr val="94A3B8"/>
-                </a:solidFill>
-                <a:latin typeface="Segoe UI"/>
-              </a:defRPr>
-            </a:pPr>
-            <a:r>
-              <a:t>Full architectural verification, automated test suites, and open-source implementation.</a:t>
-            </a:r>
-          </a:p>
-        </p:txBody>
-      </p:sp>
-      <p:sp>
-        <p:nvSpPr>
-          <p:cNvPr id="6" name="Rounded Rectangle 5"/>
+          <p:cNvPr id="3" name="Rounded Rectangle 2"/>
           <p:cNvSpPr/>
           <p:nvPr/>
         </p:nvSpPr>
         <p:spPr>
           <a:xfrm>
-            <a:off x="731520" y="1737360"/>
-            <a:ext cx="5212080" cy="4389120"/>
+            <a:off x="731520" y="1280160"/>
+            <a:ext cx="10698480" cy="3474720"/>
           </a:xfrm>
           <a:prstGeom prst="roundRect">
             <a:avLst/>
           </a:prstGeom>
           <a:solidFill>
-            <a:srgbClr val="0E172E"/>
-          </a:solidFill>
-          <a:ln w="12700">
-            <a:solidFill>
-              <a:srgbClr val="10B981"/>
-            </a:solidFill>
-          </a:ln>
-        </p:spPr>
-        <p:style>
-          <a:lnRef idx="1">
-            <a:schemeClr val="accent1"/>
-          </a:lnRef>
-          <a:fillRef idx="3">
-            <a:schemeClr val="accent1"/>
-          </a:fillRef>
-          <a:effectRef idx="2">
-            <a:schemeClr val="accent1"/>
-          </a:effectRef>
-          <a:fontRef idx="minor">
-            <a:schemeClr val="lt1"/>
-          </a:fontRef>
-        </p:style>
-        <p:txBody>
-          <a:bodyPr rtlCol="0" anchor="ctr"/>
-          <a:lstStyle/>
-          <a:p>
-            <a:pPr algn="ctr"/>
-          </a:p>
-        </p:txBody>
-      </p:sp>
-      <p:sp>
-        <p:nvSpPr>
-          <p:cNvPr id="7" name="TextBox 6"/>
-          <p:cNvSpPr txBox="1"/>
-          <p:nvPr/>
-        </p:nvSpPr>
-        <p:spPr>
-          <a:xfrm>
-            <a:off x="1005840" y="1920240"/>
-            <a:ext cx="4663440" cy="3931920"/>
-          </a:xfrm>
-          <a:prstGeom prst="rect">
-            <a:avLst/>
-          </a:prstGeom>
-          <a:noFill/>
-        </p:spPr>
-        <p:txBody>
-          <a:bodyPr wrap="none">
-            <a:spAutoFit/>
-          </a:bodyPr>
-          <a:lstStyle/>
-          <a:p>
-            <a:pPr>
-              <a:defRPr sz="1200" b="1">
-                <a:solidFill>
-                  <a:srgbClr val="10B981"/>
-                </a:solidFill>
-                <a:latin typeface="Segoe UI"/>
-              </a:defRPr>
-            </a:pPr>
-            <a:r>
-              <a:t>VERIFICATION &amp; PRODUCTION INVARIANTS</a:t>
-            </a:r>
-          </a:p>
-          <a:p>
-            <a:br/>
-            <a:pPr>
-              <a:defRPr sz="1050">
-                <a:solidFill>
-                  <a:srgbClr val="94A3B8"/>
-                </a:solidFill>
-                <a:latin typeface="Segoe UI"/>
-              </a:defRPr>
-            </a:pPr>
-            <a:r>
-              <a:t>• 120 / 120 Automated Tests Passing (Pytest)</a:t>
-            </a:r>
-            <a:br/>
-            <a:r>
-              <a:t>  Unit, Integration, FSM, Concurrency, and Gateway suites.</a:t>
-            </a:r>
-            <a:br/>
-            <a:br/>
-            <a:r>
-              <a:t>• Strict Relational Audit Ledger</a:t>
-            </a:r>
-            <a:br/>
-            <a:r>
-              <a:t>  Every state transition and AI recommendation permanently logged.</a:t>
-            </a:r>
-            <a:br/>
-            <a:br/>
-            <a:r>
-              <a:t>• Zero Code Mutations Needed for Scaling</a:t>
-            </a:r>
-            <a:br/>
-            <a:r>
-              <a:t>  Decoupled L7 load balancer handles multi-model worker pools.</a:t>
-            </a:r>
-            <a:br/>
-            <a:br/>
-            <a:r>
-              <a:t>• Production-Grade Benchmark Framework</a:t>
-            </a:r>
-            <a:br/>
-            <a:r>
-              <a:t>  Empirical batch evaluation supporting 10 to 100,000 transactions.</a:t>
-            </a:r>
-          </a:p>
-        </p:txBody>
-      </p:sp>
-      <p:sp>
-        <p:nvSpPr>
-          <p:cNvPr id="8" name="Rounded Rectangle 7"/>
-          <p:cNvSpPr/>
-          <p:nvPr/>
-        </p:nvSpPr>
-        <p:spPr>
-          <a:xfrm>
-            <a:off x="6217920" y="1737360"/>
-            <a:ext cx="5212080" cy="4389120"/>
-          </a:xfrm>
-          <a:prstGeom prst="roundRect">
-            <a:avLst/>
-          </a:prstGeom>
-          <a:solidFill>
-            <a:srgbClr val="0E172E"/>
+            <a:srgbClr val="132247"/>
           </a:solidFill>
           <a:ln w="12700">
             <a:solidFill>
@@ -5542,14 +5468,14 @@
       </p:sp>
       <p:sp>
         <p:nvSpPr>
-          <p:cNvPr id="9" name="TextBox 8"/>
+          <p:cNvPr id="4" name="TextBox 3"/>
           <p:cNvSpPr txBox="1"/>
           <p:nvPr/>
         </p:nvSpPr>
         <p:spPr>
           <a:xfrm>
-            <a:off x="6492240" y="1920240"/>
-            <a:ext cx="4663440" cy="3931920"/>
+            <a:off x="1097280" y="1645920"/>
+            <a:ext cx="9966960" cy="2743200"/>
           </a:xfrm>
           <a:prstGeom prst="rect">
             <a:avLst/>
@@ -5563,58 +5489,140 @@
           <a:lstStyle/>
           <a:p>
             <a:pPr>
-              <a:defRPr sz="1200" b="1">
+              <a:defRPr sz="2200" i="1">
+                <a:solidFill>
+                  <a:srgbClr val="94A3B8"/>
+                </a:solidFill>
+                <a:latin typeface="Segoe UI"/>
+              </a:defRPr>
+            </a:pPr>
+            <a:r>
+              <a:t>“AI shouldn't replace payment operations.”</a:t>
+            </a:r>
+          </a:p>
+          <a:p>
+            <a:pPr>
+              <a:defRPr sz="3200" b="1">
+                <a:solidFill>
+                  <a:srgbClr val="FFFFFF"/>
+                </a:solidFill>
+                <a:latin typeface="Segoe UI"/>
+              </a:defRPr>
+            </a:pPr>
+            <a:r>
+              <a:t>“It should become the teammate that makes them smarter.”</a:t>
+            </a:r>
+          </a:p>
+          <a:p>
+            <a:br/>
+            <a:pPr>
+              <a:defRPr sz="1400" b="1">
                 <a:solidFill>
                   <a:srgbClr val="06B6D4"/>
                 </a:solidFill>
-                <a:latin typeface="Segoe UI"/>
-              </a:defRPr>
-            </a:pPr>
-            <a:r>
-              <a:t>CORE TECHNOLOGY STACK</a:t>
-            </a:r>
-          </a:p>
-          <a:p>
+                <a:latin typeface="Consolas"/>
+              </a:defRPr>
+            </a:pPr>
+            <a:r>
+              <a:t>IRO — The Autonomous AI Teammate for Payment Operations</a:t>
+            </a:r>
             <a:br/>
+            <a:r>
+              <a:t>Investigate.  Reason.  Orchestrate.  Verify.</a:t>
+            </a:r>
+          </a:p>
+        </p:txBody>
+      </p:sp>
+      <p:sp>
+        <p:nvSpPr>
+          <p:cNvPr id="5" name="Rounded Rectangle 4"/>
+          <p:cNvSpPr/>
+          <p:nvPr/>
+        </p:nvSpPr>
+        <p:spPr>
+          <a:xfrm>
+            <a:off x="731520" y="5120640"/>
+            <a:ext cx="10698480" cy="1097280"/>
+          </a:xfrm>
+          <a:prstGeom prst="roundRect">
+            <a:avLst/>
+          </a:prstGeom>
+          <a:solidFill>
+            <a:srgbClr val="0E172E"/>
+          </a:solidFill>
+          <a:ln w="12700">
+            <a:solidFill>
+              <a:srgbClr val="1E293B"/>
+            </a:solidFill>
+          </a:ln>
+        </p:spPr>
+        <p:style>
+          <a:lnRef idx="1">
+            <a:schemeClr val="accent1"/>
+          </a:lnRef>
+          <a:fillRef idx="3">
+            <a:schemeClr val="accent1"/>
+          </a:fillRef>
+          <a:effectRef idx="2">
+            <a:schemeClr val="accent1"/>
+          </a:effectRef>
+          <a:fontRef idx="minor">
+            <a:schemeClr val="lt1"/>
+          </a:fontRef>
+        </p:style>
+        <p:txBody>
+          <a:bodyPr rtlCol="0" anchor="ctr"/>
+          <a:lstStyle/>
+          <a:p>
+            <a:pPr algn="ctr"/>
+          </a:p>
+        </p:txBody>
+      </p:sp>
+      <p:sp>
+        <p:nvSpPr>
+          <p:cNvPr id="6" name="TextBox 5"/>
+          <p:cNvSpPr txBox="1"/>
+          <p:nvPr/>
+        </p:nvSpPr>
+        <p:spPr>
+          <a:xfrm>
+            <a:off x="1005840" y="5257800"/>
+            <a:ext cx="10149840" cy="822960"/>
+          </a:xfrm>
+          <a:prstGeom prst="rect">
+            <a:avLst/>
+          </a:prstGeom>
+          <a:noFill/>
+        </p:spPr>
+        <p:txBody>
+          <a:bodyPr wrap="none">
+            <a:spAutoFit/>
+          </a:bodyPr>
+          <a:lstStyle/>
+          <a:p>
+            <a:pPr>
+              <a:defRPr sz="1100" b="1">
+                <a:solidFill>
+                  <a:srgbClr val="60A5FA"/>
+                </a:solidFill>
+                <a:latin typeface="Segoe UI"/>
+              </a:defRPr>
+            </a:pPr>
+            <a:r>
+              <a:t>RAZORPAY AI BUILDATHON 2026 • TRACK 3: AUTONOMOUS AI TEAMMATES</a:t>
+            </a:r>
+          </a:p>
+          <a:p>
             <a:pPr>
               <a:defRPr sz="1050">
                 <a:solidFill>
-                  <a:srgbClr val="FFFFFF"/>
-                </a:solidFill>
-                <a:latin typeface="Segoe UI"/>
-              </a:defRPr>
-            </a:pPr>
-            <a:r>
-              <a:t>• Backend Framework: Python 3.12 • FastAPI • Pydantic v2</a:t>
-            </a:r>
-            <a:br/>
-            <a:r>
-              <a:t>• Persistence: PostgreSQL 16 (AsyncPG / SQLAlchemy 2.0)</a:t>
-            </a:r>
-            <a:br/>
-            <a:r>
-              <a:t>• Distributed State: Redis 7 (Atomic TTL Locks &amp; Keys)</a:t>
-            </a:r>
-            <a:br/>
-            <a:r>
-              <a:t>• Event Backbone: Decoupled Kafka Event Contract Architecture</a:t>
-            </a:r>
-            <a:br/>
-            <a:r>
-              <a:t>• AI Tier: Tiered Model Router + L7 Adaptive Load Balancer</a:t>
-            </a:r>
-            <a:br/>
-            <a:r>
-              <a:t>• Observability: Real-Time Recovery Dashboard &amp; Telemetry API</a:t>
-            </a:r>
-            <a:br/>
-            <a:br/>
-            <a:r>
-              <a:t>PROJECT AUTHOR</a:t>
-            </a:r>
-            <a:br/>
-            <a:r>
-              <a:t>Om Dapke  •  github.com/omdapke01</a:t>
+                  <a:srgbClr val="94A3B8"/>
+                </a:solidFill>
+                <a:latin typeface="Segoe UI"/>
+              </a:defRPr>
+            </a:pPr>
+            <a:r>
+              <a:t>Author: Om Dapke  •  github.com/omdapke01/intelligent-recovery-orchestrator  •  120 / 120 Pytest Passing</a:t>
             </a:r>
           </a:p>
         </p:txBody>
@@ -5711,7 +5719,7 @@
               </a:defRPr>
             </a:pPr>
             <a:r>
-              <a:t>01. THE PROBLEM SPACE</a:t>
+              <a:t>01. PROBLEM STATEMENT</a:t>
             </a:r>
           </a:p>
         </p:txBody>
@@ -5747,7 +5755,7 @@
               </a:defRPr>
             </a:pPr>
             <a:r>
-              <a:t>The Fundamental Insight: 1 Failure → 5 Decisions</a:t>
+              <a:t>A failed payment isn't necessarily a failed transaction.</a:t>
             </a:r>
           </a:p>
         </p:txBody>
@@ -5783,7 +5791,7 @@
               </a:defRPr>
             </a:pPr>
             <a:r>
-              <a:t>In payments, the wrong recovery decision can be far worse than no recovery at all.</a:t>
+              <a:t>The hard problem in payment operations isn't detecting failure. It's deciding what to do next — safely.</a:t>
             </a:r>
           </a:p>
         </p:txBody>
@@ -5797,13 +5805,13 @@
         <p:spPr>
           <a:xfrm>
             <a:off x="731520" y="1737360"/>
-            <a:ext cx="3291840" cy="4114800"/>
+            <a:ext cx="5212080" cy="4297680"/>
           </a:xfrm>
           <a:prstGeom prst="roundRect">
             <a:avLst/>
           </a:prstGeom>
           <a:solidFill>
-            <a:srgbClr val="132247"/>
+            <a:srgbClr val="0E172E"/>
           </a:solidFill>
           <a:ln w="12700">
             <a:solidFill>
@@ -5841,8 +5849,8 @@
         </p:nvSpPr>
         <p:spPr>
           <a:xfrm>
-            <a:off x="1005840" y="2011680"/>
-            <a:ext cx="2743200" cy="3566160"/>
+            <a:off x="1005840" y="1965960"/>
+            <a:ext cx="4663440" cy="3840480"/>
           </a:xfrm>
           <a:prstGeom prst="rect">
             <a:avLst/>
@@ -5850,13 +5858,13 @@
           <a:noFill/>
         </p:spPr>
         <p:txBody>
-          <a:bodyPr wrap="square">
+          <a:bodyPr wrap="none">
             <a:spAutoFit/>
           </a:bodyPr>
           <a:lstStyle/>
           <a:p>
             <a:pPr>
-              <a:defRPr sz="1000" b="1">
+              <a:defRPr sz="1300" b="1">
                 <a:solidFill>
                   <a:srgbClr val="EF4444"/>
                 </a:solidFill>
@@ -5864,67 +5872,60 @@
               </a:defRPr>
             </a:pPr>
             <a:r>
-              <a:t>ORIGINATING EVENT</a:t>
-            </a:r>
-          </a:p>
-          <a:p>
-            <a:pPr>
-              <a:defRPr sz="3200" b="1">
+              <a:t>TRADITIONAL AUTOMATION: BLIND RETRIES</a:t>
+            </a:r>
+          </a:p>
+          <a:p>
+            <a:pPr>
+              <a:defRPr sz="1100" b="1">
                 <a:solidFill>
                   <a:srgbClr val="FFFFFF"/>
                 </a:solidFill>
-                <a:latin typeface="Segoe UI"/>
-              </a:defRPr>
-            </a:pPr>
-            <a:r>
-              <a:t>₹75,000</a:t>
-            </a:r>
-          </a:p>
-          <a:p>
-            <a:pPr>
-              <a:defRPr sz="1100">
+                <a:latin typeface="Consolas"/>
+              </a:defRPr>
+            </a:pPr>
+            <a:r>
+              <a:t>IF PAYMENT FAILS → RETRY IMMEDIATELY</a:t>
+            </a:r>
+          </a:p>
+          <a:p>
+            <a:br/>
+            <a:pPr>
+              <a:defRPr sz="1050">
                 <a:solidFill>
                   <a:srgbClr val="94A3B8"/>
                 </a:solidFill>
-                <a:latin typeface="Consolas"/>
-              </a:defRPr>
-            </a:pPr>
-            <a:r>
-              <a:t>PAYMENT FAILED</a:t>
+                <a:latin typeface="Segoe UI"/>
+              </a:defRPr>
+            </a:pPr>
+            <a:r>
+              <a:t>• Flawed Assumption: Treats every payment failure as a simple transient network glitch.</a:t>
             </a:r>
             <a:br/>
-            <a:r>
-              <a:t>Attempt 2 of 3 • Credit Card</a:t>
-            </a:r>
             <a:br/>
             <a:r>
-              <a:t>Error: GATEWAY_TIMEOUT</a:t>
+              <a:t>• Catastrophic Consequences in Fintech:</a:t>
             </a:r>
             <a:br/>
             <a:r>
-              <a:t>Route: HDFC_CARDS (Degraded)</a:t>
-            </a:r>
-          </a:p>
-          <a:p>
+              <a:t>  - Double debits when timeouts are retried blindly</a:t>
+            </a:r>
             <a:br/>
-            <a:pPr>
-              <a:defRPr sz="1100">
-                <a:solidFill>
-                  <a:srgbClr val="EF4444"/>
-                </a:solidFill>
-                <a:latin typeface="Segoe UI"/>
-              </a:defRPr>
-            </a:pPr>
-            <a:r>
-              <a:t>Naive Action:</a:t>
+            <a:r>
+              <a:t>  - Repetitive declines when banking routes are degraded</a:t>
             </a:r>
             <a:br/>
             <a:r>
-              <a:t>Blind retry on same route</a:t>
+              <a:t>  - Card block triggers from issuing bank fraud algorithms</a:t>
             </a:r>
             <a:br/>
             <a:r>
-              <a:t>Outcome: Double Debit or Repeat Failure!</a:t>
+              <a:t>  - Customer drop-off and cart abandonment</a:t>
+            </a:r>
+            <a:br/>
+            <a:br/>
+            <a:r>
+              <a:t>• Result: The wrong recovery decision is worse than no recovery at all.</a:t>
             </a:r>
           </a:p>
         </p:txBody>
@@ -5937,8 +5938,8 @@
         </p:nvSpPr>
         <p:spPr>
           <a:xfrm>
-            <a:off x="4297680" y="1737360"/>
-            <a:ext cx="3383280" cy="1097280"/>
+            <a:off x="6217920" y="1737360"/>
+            <a:ext cx="5212080" cy="4297680"/>
           </a:xfrm>
           <a:prstGeom prst="roundRect">
             <a:avLst/>
@@ -5948,7 +5949,7 @@
           </a:solidFill>
           <a:ln w="12700">
             <a:solidFill>
-              <a:srgbClr val="1E293B"/>
+              <a:srgbClr val="06B6D4"/>
             </a:solidFill>
           </a:ln>
         </p:spPr>
@@ -5982,8 +5983,8 @@
         </p:nvSpPr>
         <p:spPr>
           <a:xfrm>
-            <a:off x="4480560" y="1847088"/>
-            <a:ext cx="3017520" cy="1097280"/>
+            <a:off x="6492240" y="1965960"/>
+            <a:ext cx="4663440" cy="3840480"/>
           </a:xfrm>
           <a:prstGeom prst="rect">
             <a:avLst/>
@@ -5999,18 +6000,32 @@
             <a:pPr>
               <a:defRPr sz="1300" b="1">
                 <a:solidFill>
-                  <a:srgbClr val="F59E0B"/>
-                </a:solidFill>
-                <a:latin typeface="Segoe UI"/>
-              </a:defRPr>
-            </a:pPr>
-            <a:r>
-              <a:t>1. RETRY?</a:t>
-            </a:r>
-          </a:p>
-          <a:p>
-            <a:pPr>
-              <a:defRPr sz="1000">
+                  <a:srgbClr val="06B6D4"/>
+                </a:solidFill>
+                <a:latin typeface="Segoe UI"/>
+              </a:defRPr>
+            </a:pPr>
+            <a:r>
+              <a:t>IRO: AUTONOMOUS DECISION ENGINEERING</a:t>
+            </a:r>
+          </a:p>
+          <a:p>
+            <a:pPr>
+              <a:defRPr sz="1050" b="1">
+                <a:solidFill>
+                  <a:srgbClr val="FFFFFF"/>
+                </a:solidFill>
+                <a:latin typeface="Consolas"/>
+              </a:defRPr>
+            </a:pPr>
+            <a:r>
+              <a:t>FAILURE → CONTEXT → REASON → POLICY CHECK → SAFE ACTION</a:t>
+            </a:r>
+          </a:p>
+          <a:p>
+            <a:br/>
+            <a:pPr>
+              <a:defRPr sz="1050">
                 <a:solidFill>
                   <a:srgbClr val="94A3B8"/>
                 </a:solidFill>
@@ -6018,505 +6033,28 @@
               </a:defRPr>
             </a:pPr>
             <a:r>
-              <a:t>Try again with backoff</a:t>
+              <a:t>IRO analyzes the failure and chooses among 5 distinct recovery decisions:</a:t>
             </a:r>
             <a:br/>
-            <a:r>
-              <a:t>Transient gateway glitch or network socket drop.</a:t>
-            </a:r>
-          </a:p>
-        </p:txBody>
-      </p:sp>
-      <p:sp>
-        <p:nvSpPr>
-          <p:cNvPr id="10" name="Rounded Rectangle 9"/>
-          <p:cNvSpPr/>
-          <p:nvPr/>
-        </p:nvSpPr>
-        <p:spPr>
-          <a:xfrm>
-            <a:off x="4297680" y="3017520"/>
-            <a:ext cx="3383280" cy="1097280"/>
-          </a:xfrm>
-          <a:prstGeom prst="roundRect">
-            <a:avLst/>
-          </a:prstGeom>
-          <a:solidFill>
-            <a:srgbClr val="0E172E"/>
-          </a:solidFill>
-          <a:ln w="12700">
-            <a:solidFill>
-              <a:srgbClr val="1E293B"/>
-            </a:solidFill>
-          </a:ln>
-        </p:spPr>
-        <p:style>
-          <a:lnRef idx="1">
-            <a:schemeClr val="accent1"/>
-          </a:lnRef>
-          <a:fillRef idx="3">
-            <a:schemeClr val="accent1"/>
-          </a:fillRef>
-          <a:effectRef idx="2">
-            <a:schemeClr val="accent1"/>
-          </a:effectRef>
-          <a:fontRef idx="minor">
-            <a:schemeClr val="lt1"/>
-          </a:fontRef>
-        </p:style>
-        <p:txBody>
-          <a:bodyPr rtlCol="0" anchor="ctr"/>
-          <a:lstStyle/>
-          <a:p>
-            <a:pPr algn="ctr"/>
-          </a:p>
-        </p:txBody>
-      </p:sp>
-      <p:sp>
-        <p:nvSpPr>
-          <p:cNvPr id="11" name="TextBox 10"/>
-          <p:cNvSpPr txBox="1"/>
-          <p:nvPr/>
-        </p:nvSpPr>
-        <p:spPr>
-          <a:xfrm>
-            <a:off x="4480560" y="3127248"/>
-            <a:ext cx="3017520" cy="1097280"/>
-          </a:xfrm>
-          <a:prstGeom prst="rect">
-            <a:avLst/>
-          </a:prstGeom>
-          <a:noFill/>
-        </p:spPr>
-        <p:txBody>
-          <a:bodyPr wrap="none">
-            <a:spAutoFit/>
-          </a:bodyPr>
-          <a:lstStyle/>
-          <a:p>
-            <a:pPr>
-              <a:defRPr sz="1300" b="1">
-                <a:solidFill>
-                  <a:srgbClr val="06B6D4"/>
-                </a:solidFill>
-                <a:latin typeface="Segoe UI"/>
-              </a:defRPr>
-            </a:pPr>
-            <a:r>
-              <a:t>2. SWITCH ROUTE?</a:t>
-            </a:r>
-          </a:p>
-          <a:p>
-            <a:pPr>
-              <a:defRPr sz="1000">
-                <a:solidFill>
-                  <a:srgbClr val="94A3B8"/>
-                </a:solidFill>
-                <a:latin typeface="Segoe UI"/>
-              </a:defRPr>
-            </a:pPr>
-            <a:r>
-              <a:t>Try alternate payment rail</a:t>
-            </a:r>
             <a:br/>
             <a:r>
-              <a:t>Primary bank gateway degraded; route to healthy rail.</a:t>
-            </a:r>
-          </a:p>
-        </p:txBody>
-      </p:sp>
-      <p:sp>
-        <p:nvSpPr>
-          <p:cNvPr id="12" name="Rounded Rectangle 11"/>
-          <p:cNvSpPr/>
-          <p:nvPr/>
-        </p:nvSpPr>
-        <p:spPr>
-          <a:xfrm>
-            <a:off x="4297680" y="4297680"/>
-            <a:ext cx="3383280" cy="1097280"/>
-          </a:xfrm>
-          <a:prstGeom prst="roundRect">
-            <a:avLst/>
-          </a:prstGeom>
-          <a:solidFill>
-            <a:srgbClr val="0E172E"/>
-          </a:solidFill>
-          <a:ln w="12700">
-            <a:solidFill>
-              <a:srgbClr val="1E293B"/>
-            </a:solidFill>
-          </a:ln>
-        </p:spPr>
-        <p:style>
-          <a:lnRef idx="1">
-            <a:schemeClr val="accent1"/>
-          </a:lnRef>
-          <a:fillRef idx="3">
-            <a:schemeClr val="accent1"/>
-          </a:fillRef>
-          <a:effectRef idx="2">
-            <a:schemeClr val="accent1"/>
-          </a:effectRef>
-          <a:fontRef idx="minor">
-            <a:schemeClr val="lt1"/>
-          </a:fontRef>
-        </p:style>
-        <p:txBody>
-          <a:bodyPr rtlCol="0" anchor="ctr"/>
-          <a:lstStyle/>
-          <a:p>
-            <a:pPr algn="ctr"/>
-          </a:p>
-        </p:txBody>
-      </p:sp>
-      <p:sp>
-        <p:nvSpPr>
-          <p:cNvPr id="13" name="TextBox 12"/>
-          <p:cNvSpPr txBox="1"/>
-          <p:nvPr/>
-        </p:nvSpPr>
-        <p:spPr>
-          <a:xfrm>
-            <a:off x="4480560" y="4407408"/>
-            <a:ext cx="3017520" cy="1097280"/>
-          </a:xfrm>
-          <a:prstGeom prst="rect">
-            <a:avLst/>
-          </a:prstGeom>
-          <a:noFill/>
-        </p:spPr>
-        <p:txBody>
-          <a:bodyPr wrap="none">
-            <a:spAutoFit/>
-          </a:bodyPr>
-          <a:lstStyle/>
-          <a:p>
-            <a:pPr>
-              <a:defRPr sz="1300" b="1">
-                <a:solidFill>
-                  <a:srgbClr val="60A5FA"/>
-                </a:solidFill>
-                <a:latin typeface="Segoe UI"/>
-              </a:defRPr>
-            </a:pPr>
-            <a:r>
-              <a:t>3. ASK CUSTOMER?</a:t>
-            </a:r>
-          </a:p>
-          <a:p>
-            <a:pPr>
-              <a:defRPr sz="1000">
-                <a:solidFill>
-                  <a:srgbClr val="94A3B8"/>
-                </a:solidFill>
-                <a:latin typeface="Segoe UI"/>
-              </a:defRPr>
-            </a:pPr>
-            <a:r>
-              <a:t>Interactive recovery link</a:t>
+              <a:t>1. Retry? — Transient blip with exponential backoff</a:t>
             </a:r>
             <a:br/>
             <a:r>
-              <a:t>Expired 3DS OTP, insufficient balance, or card expired.</a:t>
-            </a:r>
-          </a:p>
-        </p:txBody>
-      </p:sp>
-      <p:sp>
-        <p:nvSpPr>
-          <p:cNvPr id="14" name="Rounded Rectangle 13"/>
-          <p:cNvSpPr/>
-          <p:nvPr/>
-        </p:nvSpPr>
-        <p:spPr>
-          <a:xfrm>
-            <a:off x="7955279" y="1737360"/>
-            <a:ext cx="3383280" cy="1097280"/>
-          </a:xfrm>
-          <a:prstGeom prst="roundRect">
-            <a:avLst/>
-          </a:prstGeom>
-          <a:solidFill>
-            <a:srgbClr val="0E172E"/>
-          </a:solidFill>
-          <a:ln w="12700">
-            <a:solidFill>
-              <a:srgbClr val="1E293B"/>
-            </a:solidFill>
-          </a:ln>
-        </p:spPr>
-        <p:style>
-          <a:lnRef idx="1">
-            <a:schemeClr val="accent1"/>
-          </a:lnRef>
-          <a:fillRef idx="3">
-            <a:schemeClr val="accent1"/>
-          </a:fillRef>
-          <a:effectRef idx="2">
-            <a:schemeClr val="accent1"/>
-          </a:effectRef>
-          <a:fontRef idx="minor">
-            <a:schemeClr val="lt1"/>
-          </a:fontRef>
-        </p:style>
-        <p:txBody>
-          <a:bodyPr rtlCol="0" anchor="ctr"/>
-          <a:lstStyle/>
-          <a:p>
-            <a:pPr algn="ctr"/>
-          </a:p>
-        </p:txBody>
-      </p:sp>
-      <p:sp>
-        <p:nvSpPr>
-          <p:cNvPr id="15" name="TextBox 14"/>
-          <p:cNvSpPr txBox="1"/>
-          <p:nvPr/>
-        </p:nvSpPr>
-        <p:spPr>
-          <a:xfrm>
-            <a:off x="8138159" y="1847088"/>
-            <a:ext cx="3017520" cy="1097280"/>
-          </a:xfrm>
-          <a:prstGeom prst="rect">
-            <a:avLst/>
-          </a:prstGeom>
-          <a:noFill/>
-        </p:spPr>
-        <p:txBody>
-          <a:bodyPr wrap="none">
-            <a:spAutoFit/>
-          </a:bodyPr>
-          <a:lstStyle/>
-          <a:p>
-            <a:pPr>
-              <a:defRPr sz="1300" b="1">
-                <a:solidFill>
-                  <a:srgbClr val="0284C7"/>
-                </a:solidFill>
-                <a:latin typeface="Segoe UI"/>
-              </a:defRPr>
-            </a:pPr>
-            <a:r>
-              <a:t>4. WAIT?</a:t>
-            </a:r>
-          </a:p>
-          <a:p>
-            <a:pPr>
-              <a:defRPr sz="1000">
-                <a:solidFill>
-                  <a:srgbClr val="94A3B8"/>
-                </a:solidFill>
-                <a:latin typeface="Segoe UI"/>
-              </a:defRPr>
-            </a:pPr>
-            <a:r>
-              <a:t>Hold for reconciliation</a:t>
+              <a:t>2. Switch route? — Bank gateway degraded; failover to healthy rail</a:t>
             </a:r>
             <a:br/>
             <a:r>
-              <a:t>Gateway timeout: bank may still be capturing in-flight.</a:t>
-            </a:r>
-          </a:p>
-        </p:txBody>
-      </p:sp>
-      <p:sp>
-        <p:nvSpPr>
-          <p:cNvPr id="16" name="Rounded Rectangle 15"/>
-          <p:cNvSpPr/>
-          <p:nvPr/>
-        </p:nvSpPr>
-        <p:spPr>
-          <a:xfrm>
-            <a:off x="7955279" y="3017520"/>
-            <a:ext cx="3383280" cy="1097280"/>
-          </a:xfrm>
-          <a:prstGeom prst="roundRect">
-            <a:avLst/>
-          </a:prstGeom>
-          <a:solidFill>
-            <a:srgbClr val="0E172E"/>
-          </a:solidFill>
-          <a:ln w="12700">
-            <a:solidFill>
-              <a:srgbClr val="1E293B"/>
-            </a:solidFill>
-          </a:ln>
-        </p:spPr>
-        <p:style>
-          <a:lnRef idx="1">
-            <a:schemeClr val="accent1"/>
-          </a:lnRef>
-          <a:fillRef idx="3">
-            <a:schemeClr val="accent1"/>
-          </a:fillRef>
-          <a:effectRef idx="2">
-            <a:schemeClr val="accent1"/>
-          </a:effectRef>
-          <a:fontRef idx="minor">
-            <a:schemeClr val="lt1"/>
-          </a:fontRef>
-        </p:style>
-        <p:txBody>
-          <a:bodyPr rtlCol="0" anchor="ctr"/>
-          <a:lstStyle/>
-          <a:p>
-            <a:pPr algn="ctr"/>
-          </a:p>
-        </p:txBody>
-      </p:sp>
-      <p:sp>
-        <p:nvSpPr>
-          <p:cNvPr id="17" name="TextBox 16"/>
-          <p:cNvSpPr txBox="1"/>
-          <p:nvPr/>
-        </p:nvSpPr>
-        <p:spPr>
-          <a:xfrm>
-            <a:off x="8138159" y="3127248"/>
-            <a:ext cx="3017520" cy="1097280"/>
-          </a:xfrm>
-          <a:prstGeom prst="rect">
-            <a:avLst/>
-          </a:prstGeom>
-          <a:noFill/>
-        </p:spPr>
-        <p:txBody>
-          <a:bodyPr wrap="none">
-            <a:spAutoFit/>
-          </a:bodyPr>
-          <a:lstStyle/>
-          <a:p>
-            <a:pPr>
-              <a:defRPr sz="1300" b="1">
-                <a:solidFill>
-                  <a:srgbClr val="EF4444"/>
-                </a:solidFill>
-                <a:latin typeface="Segoe UI"/>
-              </a:defRPr>
-            </a:pPr>
-            <a:r>
-              <a:t>5. STOP?</a:t>
-            </a:r>
-          </a:p>
-          <a:p>
-            <a:pPr>
-              <a:defRPr sz="1000">
-                <a:solidFill>
-                  <a:srgbClr val="94A3B8"/>
-                </a:solidFill>
-                <a:latin typeface="Segoe UI"/>
-              </a:defRPr>
-            </a:pPr>
-            <a:r>
-              <a:t>Halt recovery immediately</a:t>
+              <a:t>3. Ask customer? — 3DS OTP expired or balance issue; send recovery link</a:t>
             </a:r>
             <a:br/>
             <a:r>
-              <a:t>Hard decline, fraud stop, or merchant max retry reached.</a:t>
-            </a:r>
-          </a:p>
-        </p:txBody>
-      </p:sp>
-      <p:sp>
-        <p:nvSpPr>
-          <p:cNvPr id="18" name="Rounded Rectangle 17"/>
-          <p:cNvSpPr/>
-          <p:nvPr/>
-        </p:nvSpPr>
-        <p:spPr>
-          <a:xfrm>
-            <a:off x="7955279" y="4297680"/>
-            <a:ext cx="3383280" cy="1554480"/>
-          </a:xfrm>
-          <a:prstGeom prst="roundRect">
-            <a:avLst/>
-          </a:prstGeom>
-          <a:solidFill>
-            <a:srgbClr val="0B1124"/>
-          </a:solidFill>
-          <a:ln w="12700">
-            <a:solidFill>
-              <a:srgbClr val="F59E0B"/>
-            </a:solidFill>
-          </a:ln>
-        </p:spPr>
-        <p:style>
-          <a:lnRef idx="1">
-            <a:schemeClr val="accent1"/>
-          </a:lnRef>
-          <a:fillRef idx="3">
-            <a:schemeClr val="accent1"/>
-          </a:fillRef>
-          <a:effectRef idx="2">
-            <a:schemeClr val="accent1"/>
-          </a:effectRef>
-          <a:fontRef idx="minor">
-            <a:schemeClr val="lt1"/>
-          </a:fontRef>
-        </p:style>
-        <p:txBody>
-          <a:bodyPr rtlCol="0" anchor="ctr"/>
-          <a:lstStyle/>
-          <a:p>
-            <a:pPr algn="ctr"/>
-          </a:p>
-        </p:txBody>
-      </p:sp>
-      <p:sp>
-        <p:nvSpPr>
-          <p:cNvPr id="19" name="TextBox 18"/>
-          <p:cNvSpPr txBox="1"/>
-          <p:nvPr/>
-        </p:nvSpPr>
-        <p:spPr>
-          <a:xfrm>
-            <a:off x="8138160" y="4389120"/>
-            <a:ext cx="3017520" cy="1371600"/>
-          </a:xfrm>
-          <a:prstGeom prst="rect">
-            <a:avLst/>
-          </a:prstGeom>
-          <a:noFill/>
-        </p:spPr>
-        <p:txBody>
-          <a:bodyPr wrap="none">
-            <a:spAutoFit/>
-          </a:bodyPr>
-          <a:lstStyle/>
-          <a:p>
-            <a:pPr>
-              <a:defRPr sz="1000" b="1">
-                <a:solidFill>
-                  <a:srgbClr val="F59E0B"/>
-                </a:solidFill>
-                <a:latin typeface="Segoe UI"/>
-              </a:defRPr>
-            </a:pPr>
-            <a:r>
-              <a:t>THE COST OF GUESSING</a:t>
-            </a:r>
-          </a:p>
-          <a:p>
-            <a:pPr>
-              <a:defRPr sz="1000">
-                <a:solidFill>
-                  <a:srgbClr val="94A3B8"/>
-                </a:solidFill>
-                <a:latin typeface="Segoe UI"/>
-              </a:defRPr>
-            </a:pPr>
-            <a:r>
-              <a:t>• Double debits lead to chargeback penalties</a:t>
+              <a:t>4. Wait? — Ambiguous timeout; hold for bank reconciliation</a:t>
             </a:r>
             <a:br/>
             <a:r>
-              <a:t>• Inappropriate retries trigger bank fraud throttles</a:t>
-            </a:r>
-            <a:br/>
-            <a:r>
-              <a:t>• Blind automation causes severe customer churn</a:t>
+              <a:t>5. STOP? — Hard decline, fraud flag, or merchant limit reached</a:t>
             </a:r>
           </a:p>
         </p:txBody>
@@ -6613,7 +6151,7 @@
               </a:defRPr>
             </a:pPr>
             <a:r>
-              <a:t>02. ARCHITECTURE &amp; HIERARCHY</a:t>
+              <a:t>02. PROPOSED SOLUTION</a:t>
             </a:r>
           </a:p>
         </p:txBody>
@@ -6649,7 +6187,7 @@
               </a:defRPr>
             </a:pPr>
             <a:r>
-              <a:t>The Decision Hierarchy: AI Proposes, System Decides</a:t>
+              <a:t>Meet IRO: The Autonomous AI Teammate for Payment Operations</a:t>
             </a:r>
           </a:p>
         </p:txBody>
@@ -6685,7 +6223,7 @@
               </a:defRPr>
             </a:pPr>
             <a:r>
-              <a:t>Deterministic rules handle what we understand; AI is engaged only when decisions become ambiguous.</a:t>
+              <a:t>An AI teammate that investigates ambiguous payment failures, reasons about recovery, and orchestrates safe actions.</a:t>
             </a:r>
           </a:p>
         </p:txBody>
@@ -6699,7 +6237,7 @@
         <p:spPr>
           <a:xfrm>
             <a:off x="731520" y="1737360"/>
-            <a:ext cx="3383280" cy="3474720"/>
+            <a:ext cx="1993392" cy="3291840"/>
           </a:xfrm>
           <a:prstGeom prst="roundRect">
             <a:avLst/>
@@ -6743,8 +6281,8 @@
         </p:nvSpPr>
         <p:spPr>
           <a:xfrm>
-            <a:off x="914400" y="1920240"/>
-            <a:ext cx="3017520" cy="3474720"/>
+            <a:off x="868680" y="1920240"/>
+            <a:ext cx="1719072" cy="2926080"/>
           </a:xfrm>
           <a:prstGeom prst="rect">
             <a:avLst/>
@@ -6752,7 +6290,7 @@
           <a:noFill/>
         </p:spPr>
         <p:txBody>
-          <a:bodyPr wrap="none">
+          <a:bodyPr wrap="square">
             <a:spAutoFit/>
           </a:bodyPr>
           <a:lstStyle/>
@@ -6766,41 +6304,34 @@
               </a:defRPr>
             </a:pPr>
             <a:r>
-              <a:t>TIER 1: DETERMINISTIC ENGINE</a:t>
-            </a:r>
-          </a:p>
-          <a:p>
-            <a:pPr>
-              <a:defRPr sz="1000">
+              <a:t>1. INVESTIGATE</a:t>
+            </a:r>
+          </a:p>
+          <a:p>
+            <a:pPr>
+              <a:defRPr sz="1200" b="1">
+                <a:solidFill>
+                  <a:srgbClr val="FFFFFF"/>
+                </a:solidFill>
+                <a:latin typeface="Segoe UI"/>
+              </a:defRPr>
+            </a:pPr>
+            <a:r>
+              <a:t>Context Telemetry</a:t>
+            </a:r>
+          </a:p>
+          <a:p>
+            <a:br/>
+            <a:pPr>
+              <a:defRPr sz="950">
                 <a:solidFill>
                   <a:srgbClr val="94A3B8"/>
                 </a:solidFill>
-                <a:latin typeface="Consolas"/>
-              </a:defRPr>
-            </a:pPr>
-            <a:r>
-              <a:t>&lt; 1ms Latency  •  68% of All Traffic</a:t>
-            </a:r>
-          </a:p>
-          <a:p>
-            <a:pPr>
-              <a:defRPr sz="1050">
-                <a:solidFill>
-                  <a:srgbClr val="FFFFFF"/>
-                </a:solidFill>
-                <a:latin typeface="Segoe UI"/>
-              </a:defRPr>
-            </a:pPr>
-            <a:r>
-              <a:t>• Static rule-based evaluation &amp; idempotent cache lookup</a:t>
-            </a:r>
-            <a:br/>
-            <a:r>
-              <a:t>• Automatically handles standard transient failures &amp; terminal stops</a:t>
-            </a:r>
-            <a:br/>
-            <a:r>
-              <a:t>• Zero AI token overhead, deterministic SLA safety</a:t>
+                <a:latin typeface="Segoe UI"/>
+              </a:defRPr>
+            </a:pPr>
+            <a:r>
+              <a:t>Gathers multi-rail telemetry, previous attempt sequence, customer profile, and merchant SLA.</a:t>
             </a:r>
           </a:p>
         </p:txBody>
@@ -6813,8 +6344,8 @@
         </p:nvSpPr>
         <p:spPr>
           <a:xfrm>
-            <a:off x="4389120" y="1737360"/>
-            <a:ext cx="3383280" cy="3474720"/>
+            <a:off x="2907792" y="1737360"/>
+            <a:ext cx="1993392" cy="3291840"/>
           </a:xfrm>
           <a:prstGeom prst="roundRect">
             <a:avLst/>
@@ -6858,8 +6389,8 @@
         </p:nvSpPr>
         <p:spPr>
           <a:xfrm>
-            <a:off x="4572000" y="1920240"/>
-            <a:ext cx="3017520" cy="3474720"/>
+            <a:off x="3044952" y="1920240"/>
+            <a:ext cx="1719072" cy="2926080"/>
           </a:xfrm>
           <a:prstGeom prst="rect">
             <a:avLst/>
@@ -6867,7 +6398,7 @@
           <a:noFill/>
         </p:spPr>
         <p:txBody>
-          <a:bodyPr wrap="none">
+          <a:bodyPr wrap="square">
             <a:spAutoFit/>
           </a:bodyPr>
           <a:lstStyle/>
@@ -6875,47 +6406,40 @@
             <a:pPr>
               <a:defRPr sz="1100" b="1">
                 <a:solidFill>
-                  <a:srgbClr val="60A5FA"/>
-                </a:solidFill>
-                <a:latin typeface="Segoe UI"/>
-              </a:defRPr>
-            </a:pPr>
-            <a:r>
-              <a:t>TIER 2: MODEL ROUTER &amp; GATEWAY</a:t>
-            </a:r>
-          </a:p>
-          <a:p>
-            <a:pPr>
-              <a:defRPr sz="1000">
+                  <a:srgbClr val="06B6D4"/>
+                </a:solidFill>
+                <a:latin typeface="Segoe UI"/>
+              </a:defRPr>
+            </a:pPr>
+            <a:r>
+              <a:t>2. REASON</a:t>
+            </a:r>
+          </a:p>
+          <a:p>
+            <a:pPr>
+              <a:defRPr sz="1200" b="1">
+                <a:solidFill>
+                  <a:srgbClr val="FFFFFF"/>
+                </a:solidFill>
+                <a:latin typeface="Segoe UI"/>
+              </a:defRPr>
+            </a:pPr>
+            <a:r>
+              <a:t>Strategic Evaluation</a:t>
+            </a:r>
+          </a:p>
+          <a:p>
+            <a:br/>
+            <a:pPr>
+              <a:defRPr sz="950">
                 <a:solidFill>
                   <a:srgbClr val="94A3B8"/>
                 </a:solidFill>
-                <a:latin typeface="Consolas"/>
-              </a:defRPr>
-            </a:pPr>
-            <a:r>
-              <a:t>15ms Latency  •  Classification &amp; Routing</a:t>
-            </a:r>
-          </a:p>
-          <a:p>
-            <a:pPr>
-              <a:defRPr sz="1050">
-                <a:solidFill>
-                  <a:srgbClr val="FFFFFF"/>
-                </a:solidFill>
-                <a:latin typeface="Segoe UI"/>
-              </a:defRPr>
-            </a:pPr>
-            <a:r>
-              <a:t>• Intent classification for ambiguous errors</a:t>
-            </a:r>
-            <a:br/>
-            <a:r>
-              <a:t>• Selects optimal model tier (Fast Classifier vs Deep Specialist)</a:t>
-            </a:r>
-            <a:br/>
-            <a:r>
-              <a:t>• Evaluates route telemetry &amp; merchant profile metadata</a:t>
+                <a:latin typeface="Segoe UI"/>
+              </a:defRPr>
+            </a:pPr>
+            <a:r>
+              <a:t>Analyzes route health, failure codes, customer risk tier, and historical payment patterns.</a:t>
             </a:r>
           </a:p>
         </p:txBody>
@@ -6928,8 +6452,116 @@
         </p:nvSpPr>
         <p:spPr>
           <a:xfrm>
-            <a:off x="8046720" y="1737360"/>
-            <a:ext cx="3383280" cy="3474720"/>
+            <a:off x="5084064" y="1737360"/>
+            <a:ext cx="1993392" cy="3291840"/>
+          </a:xfrm>
+          <a:prstGeom prst="roundRect">
+            <a:avLst/>
+          </a:prstGeom>
+          <a:solidFill>
+            <a:srgbClr val="0E172E"/>
+          </a:solidFill>
+          <a:ln w="12700">
+            <a:solidFill>
+              <a:srgbClr val="2563EB"/>
+            </a:solidFill>
+          </a:ln>
+        </p:spPr>
+        <p:style>
+          <a:lnRef idx="1">
+            <a:schemeClr val="accent1"/>
+          </a:lnRef>
+          <a:fillRef idx="3">
+            <a:schemeClr val="accent1"/>
+          </a:fillRef>
+          <a:effectRef idx="2">
+            <a:schemeClr val="accent1"/>
+          </a:effectRef>
+          <a:fontRef idx="minor">
+            <a:schemeClr val="lt1"/>
+          </a:fontRef>
+        </p:style>
+        <p:txBody>
+          <a:bodyPr rtlCol="0" anchor="ctr"/>
+          <a:lstStyle/>
+          <a:p>
+            <a:pPr algn="ctr"/>
+          </a:p>
+        </p:txBody>
+      </p:sp>
+      <p:sp>
+        <p:nvSpPr>
+          <p:cNvPr id="11" name="TextBox 10"/>
+          <p:cNvSpPr txBox="1"/>
+          <p:nvPr/>
+        </p:nvSpPr>
+        <p:spPr>
+          <a:xfrm>
+            <a:off x="5221224" y="1920240"/>
+            <a:ext cx="1719072" cy="2926080"/>
+          </a:xfrm>
+          <a:prstGeom prst="rect">
+            <a:avLst/>
+          </a:prstGeom>
+          <a:noFill/>
+        </p:spPr>
+        <p:txBody>
+          <a:bodyPr wrap="square">
+            <a:spAutoFit/>
+          </a:bodyPr>
+          <a:lstStyle/>
+          <a:p>
+            <a:pPr>
+              <a:defRPr sz="1100" b="1">
+                <a:solidFill>
+                  <a:srgbClr val="06B6D4"/>
+                </a:solidFill>
+                <a:latin typeface="Segoe UI"/>
+              </a:defRPr>
+            </a:pPr>
+            <a:r>
+              <a:t>3. RECOMMEND</a:t>
+            </a:r>
+          </a:p>
+          <a:p>
+            <a:pPr>
+              <a:defRPr sz="1200" b="1">
+                <a:solidFill>
+                  <a:srgbClr val="FFFFFF"/>
+                </a:solidFill>
+                <a:latin typeface="Segoe UI"/>
+              </a:defRPr>
+            </a:pPr>
+            <a:r>
+              <a:t>Structured Proposal</a:t>
+            </a:r>
+          </a:p>
+          <a:p>
+            <a:br/>
+            <a:pPr>
+              <a:defRPr sz="950">
+                <a:solidFill>
+                  <a:srgbClr val="94A3B8"/>
+                </a:solidFill>
+                <a:latin typeface="Segoe UI"/>
+              </a:defRPr>
+            </a:pPr>
+            <a:r>
+              <a:t>Synthesizes structured, typed recovery strategy with clear audit rationale (READ-ONLY).</a:t>
+            </a:r>
+          </a:p>
+        </p:txBody>
+      </p:sp>
+      <p:sp>
+        <p:nvSpPr>
+          <p:cNvPr id="12" name="Rounded Rectangle 11"/>
+          <p:cNvSpPr/>
+          <p:nvPr/>
+        </p:nvSpPr>
+        <p:spPr>
+          <a:xfrm>
+            <a:off x="7260336" y="1737360"/>
+            <a:ext cx="1993392" cy="3291840"/>
           </a:xfrm>
           <a:prstGeom prst="roundRect">
             <a:avLst/>
@@ -6967,14 +6599,14 @@
       </p:sp>
       <p:sp>
         <p:nvSpPr>
-          <p:cNvPr id="11" name="TextBox 10"/>
+          <p:cNvPr id="13" name="TextBox 12"/>
           <p:cNvSpPr txBox="1"/>
           <p:nvPr/>
         </p:nvSpPr>
         <p:spPr>
           <a:xfrm>
-            <a:off x="8229600" y="1920240"/>
-            <a:ext cx="3017520" cy="3474720"/>
+            <a:off x="7397496" y="1920240"/>
+            <a:ext cx="1719072" cy="2926080"/>
           </a:xfrm>
           <a:prstGeom prst="rect">
             <a:avLst/>
@@ -6982,7 +6614,7 @@
           <a:noFill/>
         </p:spPr>
         <p:txBody>
-          <a:bodyPr wrap="none">
+          <a:bodyPr wrap="square">
             <a:spAutoFit/>
           </a:bodyPr>
           <a:lstStyle/>
@@ -6990,31 +6622,126 @@
             <a:pPr>
               <a:defRPr sz="1100" b="1">
                 <a:solidFill>
-                  <a:srgbClr val="2563EB"/>
-                </a:solidFill>
-                <a:latin typeface="Segoe UI"/>
-              </a:defRPr>
-            </a:pPr>
-            <a:r>
-              <a:t>TIER 3: SPECIALIST RECOVERY AGENT</a:t>
-            </a:r>
-          </a:p>
-          <a:p>
-            <a:pPr>
-              <a:defRPr sz="1000">
+                  <a:srgbClr val="06B6D4"/>
+                </a:solidFill>
+                <a:latin typeface="Segoe UI"/>
+              </a:defRPr>
+            </a:pPr>
+            <a:r>
+              <a:t>4. ORCHESTRATE</a:t>
+            </a:r>
+          </a:p>
+          <a:p>
+            <a:pPr>
+              <a:defRPr sz="1200" b="1">
+                <a:solidFill>
+                  <a:srgbClr val="FFFFFF"/>
+                </a:solidFill>
+                <a:latin typeface="Segoe UI"/>
+              </a:defRPr>
+            </a:pPr>
+            <a:r>
+              <a:t>Policy Validation</a:t>
+            </a:r>
+          </a:p>
+          <a:p>
+            <a:br/>
+            <a:pPr>
+              <a:defRPr sz="950">
                 <a:solidFill>
                   <a:srgbClr val="94A3B8"/>
                 </a:solidFill>
-                <a:latin typeface="Consolas"/>
-              </a:defRPr>
-            </a:pPr>
-            <a:r>
-              <a:t>25ms Latency  •  32% Deep Reasoning</a:t>
-            </a:r>
-          </a:p>
-          <a:p>
-            <a:pPr>
-              <a:defRPr sz="1050">
+                <a:latin typeface="Segoe UI"/>
+              </a:defRPr>
+            </a:pPr>
+            <a:r>
+              <a:t>Passes through deterministic financial policy guards, distributed locks, and idempotency barrier.</a:t>
+            </a:r>
+          </a:p>
+        </p:txBody>
+      </p:sp>
+      <p:sp>
+        <p:nvSpPr>
+          <p:cNvPr id="14" name="Rounded Rectangle 13"/>
+          <p:cNvSpPr/>
+          <p:nvPr/>
+        </p:nvSpPr>
+        <p:spPr>
+          <a:xfrm>
+            <a:off x="9436608" y="1737360"/>
+            <a:ext cx="1993392" cy="3291840"/>
+          </a:xfrm>
+          <a:prstGeom prst="roundRect">
+            <a:avLst/>
+          </a:prstGeom>
+          <a:solidFill>
+            <a:srgbClr val="0E172E"/>
+          </a:solidFill>
+          <a:ln w="12700">
+            <a:solidFill>
+              <a:srgbClr val="10B981"/>
+            </a:solidFill>
+          </a:ln>
+        </p:spPr>
+        <p:style>
+          <a:lnRef idx="1">
+            <a:schemeClr val="accent1"/>
+          </a:lnRef>
+          <a:fillRef idx="3">
+            <a:schemeClr val="accent1"/>
+          </a:fillRef>
+          <a:effectRef idx="2">
+            <a:schemeClr val="accent1"/>
+          </a:effectRef>
+          <a:fontRef idx="minor">
+            <a:schemeClr val="lt1"/>
+          </a:fontRef>
+        </p:style>
+        <p:txBody>
+          <a:bodyPr rtlCol="0" anchor="ctr"/>
+          <a:lstStyle/>
+          <a:p>
+            <a:pPr algn="ctr"/>
+          </a:p>
+        </p:txBody>
+      </p:sp>
+      <p:sp>
+        <p:nvSpPr>
+          <p:cNvPr id="15" name="TextBox 14"/>
+          <p:cNvSpPr txBox="1"/>
+          <p:nvPr/>
+        </p:nvSpPr>
+        <p:spPr>
+          <a:xfrm>
+            <a:off x="9573768" y="1920240"/>
+            <a:ext cx="1719072" cy="2926080"/>
+          </a:xfrm>
+          <a:prstGeom prst="rect">
+            <a:avLst/>
+          </a:prstGeom>
+          <a:noFill/>
+        </p:spPr>
+        <p:txBody>
+          <a:bodyPr wrap="square">
+            <a:spAutoFit/>
+          </a:bodyPr>
+          <a:lstStyle/>
+          <a:p>
+            <a:pPr>
+              <a:defRPr sz="1100" b="1">
+                <a:solidFill>
+                  <a:srgbClr val="06B6D4"/>
+                </a:solidFill>
+                <a:latin typeface="Segoe UI"/>
+              </a:defRPr>
+            </a:pPr>
+            <a:r>
+              <a:t>5. VERIFY</a:t>
+            </a:r>
+          </a:p>
+          <a:p>
+            <a:pPr>
+              <a:defRPr sz="1200" b="1">
                 <a:solidFill>
                   <a:srgbClr val="FFFFFF"/>
                 </a:solidFill>
@@ -7022,29 +6749,35 @@
               </a:defRPr>
             </a:pPr>
             <a:r>
-              <a:t>• Multi-step contextual investigation of payment history</a:t>
-            </a:r>
+              <a:t>Outcome Verification</a:t>
+            </a:r>
+          </a:p>
+          <a:p>
             <a:br/>
-            <a:r>
-              <a:t>• Evaluates degraded rails, merchant SLA &amp; customer risk</a:t>
-            </a:r>
-            <a:br/>
-            <a:r>
-              <a:t>• Proposes structured recovery plan (READ-ONLY permissions)</a:t>
-            </a:r>
-          </a:p>
-        </p:txBody>
-      </p:sp>
-      <p:sp>
-        <p:nvSpPr>
-          <p:cNvPr id="12" name="Rounded Rectangle 11"/>
+            <a:pPr>
+              <a:defRPr sz="950">
+                <a:solidFill>
+                  <a:srgbClr val="94A3B8"/>
+                </a:solidFill>
+                <a:latin typeface="Segoe UI"/>
+              </a:defRPr>
+            </a:pPr>
+            <a:r>
+              <a:t>Verifies settlement status with banking rail, updates state machine, and logs immutable audit trail.</a:t>
+            </a:r>
+          </a:p>
+        </p:txBody>
+      </p:sp>
+      <p:sp>
+        <p:nvSpPr>
+          <p:cNvPr id="16" name="Rounded Rectangle 15"/>
           <p:cNvSpPr/>
           <p:nvPr/>
         </p:nvSpPr>
         <p:spPr>
           <a:xfrm>
-            <a:off x="731520" y="5394960"/>
-            <a:ext cx="10698480" cy="1005840"/>
+            <a:off x="731520" y="5257800"/>
+            <a:ext cx="10698480" cy="1097280"/>
           </a:xfrm>
           <a:prstGeom prst="roundRect">
             <a:avLst/>
@@ -7082,14 +6815,14 @@
       </p:sp>
       <p:sp>
         <p:nvSpPr>
-          <p:cNvPr id="13" name="TextBox 12"/>
+          <p:cNvPr id="17" name="TextBox 16"/>
           <p:cNvSpPr txBox="1"/>
           <p:nvPr/>
         </p:nvSpPr>
         <p:spPr>
           <a:xfrm>
-            <a:off x="914400" y="5440680"/>
-            <a:ext cx="10332720" cy="868680"/>
+            <a:off x="1005840" y="5349240"/>
+            <a:ext cx="10149840" cy="914400"/>
           </a:xfrm>
           <a:prstGeom prst="rect">
             <a:avLst/>
@@ -7111,20 +6844,20 @@
               </a:defRPr>
             </a:pPr>
             <a:r>
-              <a:t>MANDATORY ENFORCEMENT: DETERMINISTIC FINANCIAL POLICY ENGINE</a:t>
-            </a:r>
-          </a:p>
-          <a:p>
-            <a:pPr>
-              <a:defRPr sz="1000">
-                <a:solidFill>
-                  <a:srgbClr val="94A3B8"/>
-                </a:solidFill>
-                <a:latin typeface="Segoe UI"/>
-              </a:defRPr>
-            </a:pPr>
-            <a:r>
-              <a:t>Every AI recommendation must independently satisfy hard policy guards before execution: Retry limit thresholds, maximum recovery window SLA, merchant contract permissions, and atomic payment state revalidation. AI has NO direct write access.</a:t>
+              <a:t>THE AUTONOMOUS TEAMMATE PRINCIPLE: AI PROPOSES, THE SYSTEM DECIDES</a:t>
+            </a:r>
+          </a:p>
+          <a:p>
+            <a:pPr>
+              <a:defRPr sz="1200" b="1">
+                <a:solidFill>
+                  <a:srgbClr val="FFFFFF"/>
+                </a:solidFill>
+                <a:latin typeface="Segoe UI"/>
+              </a:defRPr>
+            </a:pPr>
+            <a:r>
+              <a:t>“AI has reasoning authority, not financial authority. The AI teammate can think, investigate, and recommend. But deterministic systems decide whether its recommendation is allowed.”</a:t>
             </a:r>
           </a:p>
         </p:txBody>
@@ -7221,7 +6954,7 @@
               </a:defRPr>
             </a:pPr>
             <a:r>
-              <a:t>03. DISTRIBUTED SYSTEMS ENGINEERING</a:t>
+              <a:t>03. AGENT CAPABILITIES &amp; TOOLING</a:t>
             </a:r>
           </a:p>
         </p:txBody>
@@ -7257,7 +6990,7 @@
               </a:defRPr>
             </a:pPr>
             <a:r>
-              <a:t>The Hard Part Wasn't AI: Concurrency &amp; Idempotency</a:t>
+              <a:t>How the AI Teammate Works: 6 Bounded Read-Only Tools</a:t>
             </a:r>
           </a:p>
         </p:txBody>
@@ -7293,7 +7026,7 @@
               </a:defRPr>
             </a:pPr>
             <a:r>
-              <a:t>In an event-driven payment system, duplicate events are inevitable. Duplicate debits are intolerable.</a:t>
+              <a:t>The agent investigates payment context with deep precision — but has zero direct write access to move money.</a:t>
             </a:r>
           </a:p>
         </p:txBody>
@@ -7307,7 +7040,7 @@
         <p:spPr>
           <a:xfrm>
             <a:off x="731520" y="1737360"/>
-            <a:ext cx="5212080" cy="3657600"/>
+            <a:ext cx="3383280" cy="1645920"/>
           </a:xfrm>
           <a:prstGeom prst="roundRect">
             <a:avLst/>
@@ -7317,7 +7050,7 @@
           </a:solidFill>
           <a:ln w="12700">
             <a:solidFill>
-              <a:srgbClr val="EF4444"/>
+              <a:srgbClr val="1E293B"/>
             </a:solidFill>
           </a:ln>
         </p:spPr>
@@ -7351,8 +7084,8 @@
         </p:nvSpPr>
         <p:spPr>
           <a:xfrm>
-            <a:off x="1005840" y="1965960"/>
-            <a:ext cx="4663440" cy="3200400"/>
+            <a:off x="896112" y="1874520"/>
+            <a:ext cx="3054096" cy="1371600"/>
           </a:xfrm>
           <a:prstGeom prst="rect">
             <a:avLst/>
@@ -7366,34 +7099,33 @@
           <a:lstStyle/>
           <a:p>
             <a:pPr>
-              <a:defRPr sz="1400" b="1">
-                <a:solidFill>
-                  <a:srgbClr val="EF4444"/>
-                </a:solidFill>
-                <a:latin typeface="Segoe UI"/>
-              </a:defRPr>
-            </a:pPr>
-            <a:r>
-              <a:t>1. REDIS DISTRIBUTED LOCKING</a:t>
-            </a:r>
-          </a:p>
-          <a:p>
-            <a:pPr>
-              <a:defRPr sz="1200" i="1">
+              <a:defRPr sz="1300" b="1">
+                <a:solidFill>
+                  <a:srgbClr val="06B6D4"/>
+                </a:solidFill>
+                <a:latin typeface="Segoe UI"/>
+              </a:defRPr>
+            </a:pPr>
+            <a:r>
+              <a:t>1. Payment Context</a:t>
+            </a:r>
+          </a:p>
+          <a:p>
+            <a:pPr>
+              <a:defRPr sz="950">
                 <a:solidFill>
                   <a:srgbClr val="FFFFFF"/>
                 </a:solidFill>
-                <a:latin typeface="Segoe UI"/>
-              </a:defRPr>
-            </a:pPr>
-            <a:r>
-              <a:t>Answers: "Who can work on this payment now?"</a:t>
-            </a:r>
-          </a:p>
-          <a:p>
-            <a:br/>
-            <a:pPr>
-              <a:defRPr sz="1050">
+                <a:latin typeface="Consolas"/>
+              </a:defRPr>
+            </a:pPr>
+            <a:r>
+              <a:t>inspect_payment_context</a:t>
+            </a:r>
+          </a:p>
+          <a:p>
+            <a:pPr>
+              <a:defRPr sz="950">
                 <a:solidFill>
                   <a:srgbClr val="94A3B8"/>
                 </a:solidFill>
@@ -7401,23 +7133,7 @@
               </a:defRPr>
             </a:pPr>
             <a:r>
-              <a:t>• Prevents simultaneous recovery workers from retrying the same failure</a:t>
-            </a:r>
-            <a:br/>
-            <a:r>
-              <a:t>• Atomic key acquisition: SET lock:recovery:{payment_id} NX EX {ttl}</a:t>
-            </a:r>
-            <a:br/>
-            <a:r>
-              <a:t>• Automatic TTL expiration prevents deadlocks if a worker node crashes</a:t>
-            </a:r>
-            <a:br/>
-            <a:r>
-              <a:t>• Safe release via Lua script guarantees only lock owner can release</a:t>
-            </a:r>
-            <a:br/>
-            <a:r>
-              <a:t>• Critical for high-concurrency Kafka consumers processing failure events</a:t>
+              <a:t>Amount, currency, merchant ID, customer ID, payment method (UPI, Card, Netbanking).</a:t>
             </a:r>
           </a:p>
         </p:txBody>
@@ -7430,14 +7146,549 @@
         </p:nvSpPr>
         <p:spPr>
           <a:xfrm>
-            <a:off x="6217920" y="1737360"/>
-            <a:ext cx="5212080" cy="3657600"/>
+            <a:off x="4389120" y="1737360"/>
+            <a:ext cx="3383280" cy="1645920"/>
           </a:xfrm>
           <a:prstGeom prst="roundRect">
             <a:avLst/>
           </a:prstGeom>
           <a:solidFill>
             <a:srgbClr val="0E172E"/>
+          </a:solidFill>
+          <a:ln w="12700">
+            <a:solidFill>
+              <a:srgbClr val="1E293B"/>
+            </a:solidFill>
+          </a:ln>
+        </p:spPr>
+        <p:style>
+          <a:lnRef idx="1">
+            <a:schemeClr val="accent1"/>
+          </a:lnRef>
+          <a:fillRef idx="3">
+            <a:schemeClr val="accent1"/>
+          </a:fillRef>
+          <a:effectRef idx="2">
+            <a:schemeClr val="accent1"/>
+          </a:effectRef>
+          <a:fontRef idx="minor">
+            <a:schemeClr val="lt1"/>
+          </a:fontRef>
+        </p:style>
+        <p:txBody>
+          <a:bodyPr rtlCol="0" anchor="ctr"/>
+          <a:lstStyle/>
+          <a:p>
+            <a:pPr algn="ctr"/>
+          </a:p>
+        </p:txBody>
+      </p:sp>
+      <p:sp>
+        <p:nvSpPr>
+          <p:cNvPr id="9" name="TextBox 8"/>
+          <p:cNvSpPr txBox="1"/>
+          <p:nvPr/>
+        </p:nvSpPr>
+        <p:spPr>
+          <a:xfrm>
+            <a:off x="4553712" y="1874520"/>
+            <a:ext cx="3054096" cy="1371600"/>
+          </a:xfrm>
+          <a:prstGeom prst="rect">
+            <a:avLst/>
+          </a:prstGeom>
+          <a:noFill/>
+        </p:spPr>
+        <p:txBody>
+          <a:bodyPr wrap="none">
+            <a:spAutoFit/>
+          </a:bodyPr>
+          <a:lstStyle/>
+          <a:p>
+            <a:pPr>
+              <a:defRPr sz="1300" b="1">
+                <a:solidFill>
+                  <a:srgbClr val="60A5FA"/>
+                </a:solidFill>
+                <a:latin typeface="Segoe UI"/>
+              </a:defRPr>
+            </a:pPr>
+            <a:r>
+              <a:t>2. Payment Attempts</a:t>
+            </a:r>
+          </a:p>
+          <a:p>
+            <a:pPr>
+              <a:defRPr sz="950">
+                <a:solidFill>
+                  <a:srgbClr val="FFFFFF"/>
+                </a:solidFill>
+                <a:latin typeface="Consolas"/>
+              </a:defRPr>
+            </a:pPr>
+            <a:r>
+              <a:t>inspect_payment_attempts</a:t>
+            </a:r>
+          </a:p>
+          <a:p>
+            <a:pPr>
+              <a:defRPr sz="950">
+                <a:solidFill>
+                  <a:srgbClr val="94A3B8"/>
+                </a:solidFill>
+                <a:latin typeface="Segoe UI"/>
+              </a:defRPr>
+            </a:pPr>
+            <a:r>
+              <a:t>Sequence of prior attempts, gateway latencies, timestamps, and route history.</a:t>
+            </a:r>
+          </a:p>
+        </p:txBody>
+      </p:sp>
+      <p:sp>
+        <p:nvSpPr>
+          <p:cNvPr id="10" name="Rounded Rectangle 9"/>
+          <p:cNvSpPr/>
+          <p:nvPr/>
+        </p:nvSpPr>
+        <p:spPr>
+          <a:xfrm>
+            <a:off x="8046720" y="1737360"/>
+            <a:ext cx="3383280" cy="1645920"/>
+          </a:xfrm>
+          <a:prstGeom prst="roundRect">
+            <a:avLst/>
+          </a:prstGeom>
+          <a:solidFill>
+            <a:srgbClr val="0E172E"/>
+          </a:solidFill>
+          <a:ln w="12700">
+            <a:solidFill>
+              <a:srgbClr val="1E293B"/>
+            </a:solidFill>
+          </a:ln>
+        </p:spPr>
+        <p:style>
+          <a:lnRef idx="1">
+            <a:schemeClr val="accent1"/>
+          </a:lnRef>
+          <a:fillRef idx="3">
+            <a:schemeClr val="accent1"/>
+          </a:fillRef>
+          <a:effectRef idx="2">
+            <a:schemeClr val="accent1"/>
+          </a:effectRef>
+          <a:fontRef idx="minor">
+            <a:schemeClr val="lt1"/>
+          </a:fontRef>
+        </p:style>
+        <p:txBody>
+          <a:bodyPr rtlCol="0" anchor="ctr"/>
+          <a:lstStyle/>
+          <a:p>
+            <a:pPr algn="ctr"/>
+          </a:p>
+        </p:txBody>
+      </p:sp>
+      <p:sp>
+        <p:nvSpPr>
+          <p:cNvPr id="11" name="TextBox 10"/>
+          <p:cNvSpPr txBox="1"/>
+          <p:nvPr/>
+        </p:nvSpPr>
+        <p:spPr>
+          <a:xfrm>
+            <a:off x="8211312" y="1874520"/>
+            <a:ext cx="3054096" cy="1371600"/>
+          </a:xfrm>
+          <a:prstGeom prst="rect">
+            <a:avLst/>
+          </a:prstGeom>
+          <a:noFill/>
+        </p:spPr>
+        <p:txBody>
+          <a:bodyPr wrap="none">
+            <a:spAutoFit/>
+          </a:bodyPr>
+          <a:lstStyle/>
+          <a:p>
+            <a:pPr>
+              <a:defRPr sz="1300" b="1">
+                <a:solidFill>
+                  <a:srgbClr val="2563EB"/>
+                </a:solidFill>
+                <a:latin typeface="Segoe UI"/>
+              </a:defRPr>
+            </a:pPr>
+            <a:r>
+              <a:t>3. Failure History</a:t>
+            </a:r>
+          </a:p>
+          <a:p>
+            <a:pPr>
+              <a:defRPr sz="950">
+                <a:solidFill>
+                  <a:srgbClr val="FFFFFF"/>
+                </a:solidFill>
+                <a:latin typeface="Consolas"/>
+              </a:defRPr>
+            </a:pPr>
+            <a:r>
+              <a:t>inspect_failure_history</a:t>
+            </a:r>
+          </a:p>
+          <a:p>
+            <a:pPr>
+              <a:defRPr sz="950">
+                <a:solidFill>
+                  <a:srgbClr val="94A3B8"/>
+                </a:solidFill>
+                <a:latin typeface="Segoe UI"/>
+              </a:defRPr>
+            </a:pPr>
+            <a:r>
+              <a:t>Error taxonomy classification (Timeout, Socket Drop, Balance, Route Degradation).</a:t>
+            </a:r>
+          </a:p>
+        </p:txBody>
+      </p:sp>
+      <p:sp>
+        <p:nvSpPr>
+          <p:cNvPr id="12" name="Rounded Rectangle 11"/>
+          <p:cNvSpPr/>
+          <p:nvPr/>
+        </p:nvSpPr>
+        <p:spPr>
+          <a:xfrm>
+            <a:off x="731520" y="3566160"/>
+            <a:ext cx="3383280" cy="1645920"/>
+          </a:xfrm>
+          <a:prstGeom prst="roundRect">
+            <a:avLst/>
+          </a:prstGeom>
+          <a:solidFill>
+            <a:srgbClr val="0E172E"/>
+          </a:solidFill>
+          <a:ln w="12700">
+            <a:solidFill>
+              <a:srgbClr val="1E293B"/>
+            </a:solidFill>
+          </a:ln>
+        </p:spPr>
+        <p:style>
+          <a:lnRef idx="1">
+            <a:schemeClr val="accent1"/>
+          </a:lnRef>
+          <a:fillRef idx="3">
+            <a:schemeClr val="accent1"/>
+          </a:fillRef>
+          <a:effectRef idx="2">
+            <a:schemeClr val="accent1"/>
+          </a:effectRef>
+          <a:fontRef idx="minor">
+            <a:schemeClr val="lt1"/>
+          </a:fontRef>
+        </p:style>
+        <p:txBody>
+          <a:bodyPr rtlCol="0" anchor="ctr"/>
+          <a:lstStyle/>
+          <a:p>
+            <a:pPr algn="ctr"/>
+          </a:p>
+        </p:txBody>
+      </p:sp>
+      <p:sp>
+        <p:nvSpPr>
+          <p:cNvPr id="13" name="TextBox 12"/>
+          <p:cNvSpPr txBox="1"/>
+          <p:nvPr/>
+        </p:nvSpPr>
+        <p:spPr>
+          <a:xfrm>
+            <a:off x="896112" y="3703320"/>
+            <a:ext cx="3054096" cy="1371600"/>
+          </a:xfrm>
+          <a:prstGeom prst="rect">
+            <a:avLst/>
+          </a:prstGeom>
+          <a:noFill/>
+        </p:spPr>
+        <p:txBody>
+          <a:bodyPr wrap="none">
+            <a:spAutoFit/>
+          </a:bodyPr>
+          <a:lstStyle/>
+          <a:p>
+            <a:pPr>
+              <a:defRPr sz="1300" b="1">
+                <a:solidFill>
+                  <a:srgbClr val="F59E0B"/>
+                </a:solidFill>
+                <a:latin typeface="Segoe UI"/>
+              </a:defRPr>
+            </a:pPr>
+            <a:r>
+              <a:t>4. Customer Profile</a:t>
+            </a:r>
+          </a:p>
+          <a:p>
+            <a:pPr>
+              <a:defRPr sz="950">
+                <a:solidFill>
+                  <a:srgbClr val="FFFFFF"/>
+                </a:solidFill>
+                <a:latin typeface="Consolas"/>
+              </a:defRPr>
+            </a:pPr>
+            <a:r>
+              <a:t>inspect_customer_profile</a:t>
+            </a:r>
+          </a:p>
+          <a:p>
+            <a:pPr>
+              <a:defRPr sz="950">
+                <a:solidFill>
+                  <a:srgbClr val="94A3B8"/>
+                </a:solidFill>
+                <a:latin typeface="Segoe UI"/>
+              </a:defRPr>
+            </a:pPr>
+            <a:r>
+              <a:t>Customer risk tier, historical payment success rate, and chargeback signals.</a:t>
+            </a:r>
+          </a:p>
+        </p:txBody>
+      </p:sp>
+      <p:sp>
+        <p:nvSpPr>
+          <p:cNvPr id="14" name="Rounded Rectangle 13"/>
+          <p:cNvSpPr/>
+          <p:nvPr/>
+        </p:nvSpPr>
+        <p:spPr>
+          <a:xfrm>
+            <a:off x="4389120" y="3566160"/>
+            <a:ext cx="3383280" cy="1645920"/>
+          </a:xfrm>
+          <a:prstGeom prst="roundRect">
+            <a:avLst/>
+          </a:prstGeom>
+          <a:solidFill>
+            <a:srgbClr val="0E172E"/>
+          </a:solidFill>
+          <a:ln w="12700">
+            <a:solidFill>
+              <a:srgbClr val="1E293B"/>
+            </a:solidFill>
+          </a:ln>
+        </p:spPr>
+        <p:style>
+          <a:lnRef idx="1">
+            <a:schemeClr val="accent1"/>
+          </a:lnRef>
+          <a:fillRef idx="3">
+            <a:schemeClr val="accent1"/>
+          </a:fillRef>
+          <a:effectRef idx="2">
+            <a:schemeClr val="accent1"/>
+          </a:effectRef>
+          <a:fontRef idx="minor">
+            <a:schemeClr val="lt1"/>
+          </a:fontRef>
+        </p:style>
+        <p:txBody>
+          <a:bodyPr rtlCol="0" anchor="ctr"/>
+          <a:lstStyle/>
+          <a:p>
+            <a:pPr algn="ctr"/>
+          </a:p>
+        </p:txBody>
+      </p:sp>
+      <p:sp>
+        <p:nvSpPr>
+          <p:cNvPr id="15" name="TextBox 14"/>
+          <p:cNvSpPr txBox="1"/>
+          <p:nvPr/>
+        </p:nvSpPr>
+        <p:spPr>
+          <a:xfrm>
+            <a:off x="4553712" y="3703320"/>
+            <a:ext cx="3054096" cy="1371600"/>
+          </a:xfrm>
+          <a:prstGeom prst="rect">
+            <a:avLst/>
+          </a:prstGeom>
+          <a:noFill/>
+        </p:spPr>
+        <p:txBody>
+          <a:bodyPr wrap="none">
+            <a:spAutoFit/>
+          </a:bodyPr>
+          <a:lstStyle/>
+          <a:p>
+            <a:pPr>
+              <a:defRPr sz="1300" b="1">
+                <a:solidFill>
+                  <a:srgbClr val="EF4444"/>
+                </a:solidFill>
+                <a:latin typeface="Segoe UI"/>
+              </a:defRPr>
+            </a:pPr>
+            <a:r>
+              <a:t>5. Merchant Policy</a:t>
+            </a:r>
+          </a:p>
+          <a:p>
+            <a:pPr>
+              <a:defRPr sz="950">
+                <a:solidFill>
+                  <a:srgbClr val="FFFFFF"/>
+                </a:solidFill>
+                <a:latin typeface="Consolas"/>
+              </a:defRPr>
+            </a:pPr>
+            <a:r>
+              <a:t>inspect_merchant_policy</a:t>
+            </a:r>
+          </a:p>
+          <a:p>
+            <a:pPr>
+              <a:defRPr sz="950">
+                <a:solidFill>
+                  <a:srgbClr val="94A3B8"/>
+                </a:solidFill>
+                <a:latin typeface="Segoe UI"/>
+              </a:defRPr>
+            </a:pPr>
+            <a:r>
+              <a:t>Merchant-specific max retry caps, permitted recovery methods, and SLA windows.</a:t>
+            </a:r>
+          </a:p>
+        </p:txBody>
+      </p:sp>
+      <p:sp>
+        <p:nvSpPr>
+          <p:cNvPr id="16" name="Rounded Rectangle 15"/>
+          <p:cNvSpPr/>
+          <p:nvPr/>
+        </p:nvSpPr>
+        <p:spPr>
+          <a:xfrm>
+            <a:off x="8046720" y="3566160"/>
+            <a:ext cx="3383280" cy="1645920"/>
+          </a:xfrm>
+          <a:prstGeom prst="roundRect">
+            <a:avLst/>
+          </a:prstGeom>
+          <a:solidFill>
+            <a:srgbClr val="0E172E"/>
+          </a:solidFill>
+          <a:ln w="12700">
+            <a:solidFill>
+              <a:srgbClr val="1E293B"/>
+            </a:solidFill>
+          </a:ln>
+        </p:spPr>
+        <p:style>
+          <a:lnRef idx="1">
+            <a:schemeClr val="accent1"/>
+          </a:lnRef>
+          <a:fillRef idx="3">
+            <a:schemeClr val="accent1"/>
+          </a:fillRef>
+          <a:effectRef idx="2">
+            <a:schemeClr val="accent1"/>
+          </a:effectRef>
+          <a:fontRef idx="minor">
+            <a:schemeClr val="lt1"/>
+          </a:fontRef>
+        </p:style>
+        <p:txBody>
+          <a:bodyPr rtlCol="0" anchor="ctr"/>
+          <a:lstStyle/>
+          <a:p>
+            <a:pPr algn="ctr"/>
+          </a:p>
+        </p:txBody>
+      </p:sp>
+      <p:sp>
+        <p:nvSpPr>
+          <p:cNvPr id="17" name="TextBox 16"/>
+          <p:cNvSpPr txBox="1"/>
+          <p:nvPr/>
+        </p:nvSpPr>
+        <p:spPr>
+          <a:xfrm>
+            <a:off x="8211312" y="3703320"/>
+            <a:ext cx="3054096" cy="1371600"/>
+          </a:xfrm>
+          <a:prstGeom prst="rect">
+            <a:avLst/>
+          </a:prstGeom>
+          <a:noFill/>
+        </p:spPr>
+        <p:txBody>
+          <a:bodyPr wrap="none">
+            <a:spAutoFit/>
+          </a:bodyPr>
+          <a:lstStyle/>
+          <a:p>
+            <a:pPr>
+              <a:defRPr sz="1300" b="1">
+                <a:solidFill>
+                  <a:srgbClr val="10B981"/>
+                </a:solidFill>
+                <a:latin typeface="Segoe UI"/>
+              </a:defRPr>
+            </a:pPr>
+            <a:r>
+              <a:t>6. Route Health</a:t>
+            </a:r>
+          </a:p>
+          <a:p>
+            <a:pPr>
+              <a:defRPr sz="950">
+                <a:solidFill>
+                  <a:srgbClr val="FFFFFF"/>
+                </a:solidFill>
+                <a:latin typeface="Consolas"/>
+              </a:defRPr>
+            </a:pPr>
+            <a:r>
+              <a:t>inspect_route_health</a:t>
+            </a:r>
+          </a:p>
+          <a:p>
+            <a:pPr>
+              <a:defRPr sz="950">
+                <a:solidFill>
+                  <a:srgbClr val="94A3B8"/>
+                </a:solidFill>
+                <a:latin typeface="Segoe UI"/>
+              </a:defRPr>
+            </a:pPr>
+            <a:r>
+              <a:t>Real-time banking rail health scores (e.g. HDFC 38% vs ICICI 98.4% uptime).</a:t>
+            </a:r>
+          </a:p>
+        </p:txBody>
+      </p:sp>
+      <p:sp>
+        <p:nvSpPr>
+          <p:cNvPr id="18" name="Rounded Rectangle 17"/>
+          <p:cNvSpPr/>
+          <p:nvPr/>
+        </p:nvSpPr>
+        <p:spPr>
+          <a:xfrm>
+            <a:off x="731520" y="5440680"/>
+            <a:ext cx="10698480" cy="914400"/>
+          </a:xfrm>
+          <a:prstGeom prst="roundRect">
+            <a:avLst/>
+          </a:prstGeom>
+          <a:solidFill>
+            <a:srgbClr val="132247"/>
           </a:solidFill>
           <a:ln w="12700">
             <a:solidFill>
@@ -7469,14 +7720,14 @@
       </p:sp>
       <p:sp>
         <p:nvSpPr>
-          <p:cNvPr id="9" name="TextBox 8"/>
+          <p:cNvPr id="19" name="TextBox 18"/>
           <p:cNvSpPr txBox="1"/>
           <p:nvPr/>
         </p:nvSpPr>
         <p:spPr>
           <a:xfrm>
-            <a:off x="6492240" y="1965960"/>
-            <a:ext cx="4663440" cy="3200400"/>
+            <a:off x="1005840" y="5532120"/>
+            <a:ext cx="10149840" cy="731520"/>
           </a:xfrm>
           <a:prstGeom prst="rect">
             <a:avLst/>
@@ -7490,7 +7741,7 @@
           <a:lstStyle/>
           <a:p>
             <a:pPr>
-              <a:defRPr sz="1400" b="1">
+              <a:defRPr sz="1050" b="1">
                 <a:solidFill>
                   <a:srgbClr val="06B6D4"/>
                 </a:solidFill>
@@ -7498,26 +7749,12 @@
               </a:defRPr>
             </a:pPr>
             <a:r>
-              <a:t>2. DATABASE DURABLE IDEMPOTENCY</a:t>
-            </a:r>
-          </a:p>
-          <a:p>
-            <a:pPr>
-              <a:defRPr sz="1200" i="1">
-                <a:solidFill>
-                  <a:srgbClr val="FFFFFF"/>
-                </a:solidFill>
-                <a:latin typeface="Segoe UI"/>
-              </a:defRPr>
-            </a:pPr>
-            <a:r>
-              <a:t>Answers: "Has this recovery already happened?"</a:t>
-            </a:r>
-          </a:p>
-          <a:p>
-            <a:br/>
-            <a:pPr>
-              <a:defRPr sz="1050">
+              <a:t>HARD ISOLATION BOUNDARY: ZERO WRITE ACCESS</a:t>
+            </a:r>
+          </a:p>
+          <a:p>
+            <a:pPr>
+              <a:defRPr sz="1000">
                 <a:solidFill>
                   <a:srgbClr val="94A3B8"/>
                 </a:solidFill>
@@ -7525,104 +7762,7 @@
               </a:defRPr>
             </a:pPr>
             <a:r>
-              <a:t>• Durable barrier against retried, redelivered, or delayed messages</a:t>
-            </a:r>
-            <a:br/>
-            <a:r>
-              <a:t>• Deterministic key hashing: idemp:rec:{payment_id}:{attempt_seq}</a:t>
-            </a:r>
-            <a:br/>
-            <a:r>
-              <a:t>• Pre-execution reservation pattern: record created before API call</a:t>
-            </a:r>
-            <a:br/>
-            <a:r>
-              <a:t>• If execution crashes mid-flight, state machine handles safe reconciliation</a:t>
-            </a:r>
-            <a:br/>
-            <a:r>
-              <a:t>• Guarantees EXACTLY-ONCE financial execution across network partitions</a:t>
-            </a:r>
-          </a:p>
-        </p:txBody>
-      </p:sp>
-      <p:sp>
-        <p:nvSpPr>
-          <p:cNvPr id="10" name="Rounded Rectangle 9"/>
-          <p:cNvSpPr/>
-          <p:nvPr/>
-        </p:nvSpPr>
-        <p:spPr>
-          <a:xfrm>
-            <a:off x="731520" y="5577840"/>
-            <a:ext cx="10698480" cy="822960"/>
-          </a:xfrm>
-          <a:prstGeom prst="roundRect">
-            <a:avLst/>
-          </a:prstGeom>
-          <a:solidFill>
-            <a:srgbClr val="132247"/>
-          </a:solidFill>
-          <a:ln w="12700">
-            <a:solidFill>
-              <a:srgbClr val="0284C7"/>
-            </a:solidFill>
-          </a:ln>
-        </p:spPr>
-        <p:style>
-          <a:lnRef idx="1">
-            <a:schemeClr val="accent1"/>
-          </a:lnRef>
-          <a:fillRef idx="3">
-            <a:schemeClr val="accent1"/>
-          </a:fillRef>
-          <a:effectRef idx="2">
-            <a:schemeClr val="accent1"/>
-          </a:effectRef>
-          <a:fontRef idx="minor">
-            <a:schemeClr val="lt1"/>
-          </a:fontRef>
-        </p:style>
-        <p:txBody>
-          <a:bodyPr rtlCol="0" anchor="ctr"/>
-          <a:lstStyle/>
-          <a:p>
-            <a:pPr algn="ctr"/>
-          </a:p>
-        </p:txBody>
-      </p:sp>
-      <p:sp>
-        <p:nvSpPr>
-          <p:cNvPr id="11" name="TextBox 10"/>
-          <p:cNvSpPr txBox="1"/>
-          <p:nvPr/>
-        </p:nvSpPr>
-        <p:spPr>
-          <a:xfrm>
-            <a:off x="914400" y="5623560"/>
-            <a:ext cx="10332720" cy="685800"/>
-          </a:xfrm>
-          <a:prstGeom prst="rect">
-            <a:avLst/>
-          </a:prstGeom>
-          <a:noFill/>
-        </p:spPr>
-        <p:txBody>
-          <a:bodyPr wrap="none">
-            <a:spAutoFit/>
-          </a:bodyPr>
-          <a:lstStyle/>
-          <a:p>
-            <a:pPr>
-              <a:defRPr sz="1050" b="1">
-                <a:solidFill>
-                  <a:srgbClr val="FFFFFF"/>
-                </a:solidFill>
-                <a:latin typeface="Segoe UI"/>
-              </a:defRPr>
-            </a:pPr>
-            <a:r>
-              <a:t>KEY FINTECH LESSON: A lock alone does not guarantee exactly-once payment execution. Distributed locking coordinates in-flight concurrency; relational idempotency provides durable historical finality.</a:t>
+              <a:t>The AI teammate operates in a read-only investigation sandbox. It can inspect context and output structured JSON proposals, but cannot directly invoke payment APIs or mutate database states.</a:t>
             </a:r>
           </a:p>
         </p:txBody>
@@ -7719,7 +7859,7 @@
               </a:defRPr>
             </a:pPr>
             <a:r>
-              <a:t>04. FINANCIAL SAFETY &amp; EDGE CASES</a:t>
+              <a:t>04. UNIQUE SELLING PROPOSITION &amp; SAFETY</a:t>
             </a:r>
           </a:p>
         </p:txBody>
@@ -7755,7 +7895,7 @@
               </a:defRPr>
             </a:pPr>
             <a:r>
-              <a:t>Dynamic State Inversion &amp; Timeout Ambiguity</a:t>
+              <a:t>USP: AI Proposes. The System Decides.</a:t>
             </a:r>
           </a:p>
         </p:txBody>
@@ -7791,7 +7931,7 @@
               </a:defRPr>
             </a:pPr>
             <a:r>
-              <a:t>Payment recovery is an asynchronous time-travel problem where reality changes while you wait.</a:t>
+              <a:t>AI has reasoning authority, not financial authority. Hard deterministic gates protect every financial mutation.</a:t>
             </a:r>
           </a:p>
         </p:txBody>
@@ -7805,7 +7945,142 @@
         <p:spPr>
           <a:xfrm>
             <a:off x="731520" y="1737360"/>
-            <a:ext cx="5212080" cy="4297680"/>
+            <a:ext cx="10698480" cy="3017520"/>
+          </a:xfrm>
+          <a:prstGeom prst="roundRect">
+            <a:avLst/>
+          </a:prstGeom>
+          <a:solidFill>
+            <a:srgbClr val="132247"/>
+          </a:solidFill>
+          <a:ln w="12700">
+            <a:solidFill>
+              <a:srgbClr val="3B82F6"/>
+            </a:solidFill>
+          </a:ln>
+        </p:spPr>
+        <p:style>
+          <a:lnRef idx="1">
+            <a:schemeClr val="accent1"/>
+          </a:lnRef>
+          <a:fillRef idx="3">
+            <a:schemeClr val="accent1"/>
+          </a:fillRef>
+          <a:effectRef idx="2">
+            <a:schemeClr val="accent1"/>
+          </a:effectRef>
+          <a:fontRef idx="minor">
+            <a:schemeClr val="lt1"/>
+          </a:fontRef>
+        </p:style>
+        <p:txBody>
+          <a:bodyPr rtlCol="0" anchor="ctr"/>
+          <a:lstStyle/>
+          <a:p>
+            <a:pPr algn="ctr"/>
+          </a:p>
+        </p:txBody>
+      </p:sp>
+      <p:sp>
+        <p:nvSpPr>
+          <p:cNvPr id="7" name="TextBox 6"/>
+          <p:cNvSpPr txBox="1"/>
+          <p:nvPr/>
+        </p:nvSpPr>
+        <p:spPr>
+          <a:xfrm>
+            <a:off x="1005840" y="1874519"/>
+            <a:ext cx="10149840" cy="2743200"/>
+          </a:xfrm>
+          <a:prstGeom prst="rect">
+            <a:avLst/>
+          </a:prstGeom>
+          <a:noFill/>
+        </p:spPr>
+        <p:txBody>
+          <a:bodyPr wrap="none">
+            <a:spAutoFit/>
+          </a:bodyPr>
+          <a:lstStyle/>
+          <a:p>
+            <a:pPr>
+              <a:defRPr sz="1200" b="1">
+                <a:solidFill>
+                  <a:srgbClr val="06B6D4"/>
+                </a:solidFill>
+                <a:latin typeface="Segoe UI"/>
+              </a:defRPr>
+            </a:pPr>
+            <a:r>
+              <a:t>THE DETERMINISTIC SAFETY BOUNDARY</a:t>
+            </a:r>
+          </a:p>
+          <a:p>
+            <a:br/>
+            <a:pPr>
+              <a:defRPr sz="950">
+                <a:solidFill>
+                  <a:srgbClr val="FFFFFF"/>
+                </a:solidFill>
+                <a:latin typeface="Consolas"/>
+              </a:defRPr>
+            </a:pPr>
+            <a:r>
+              <a:t>1. AI AGENT REASONING LAYER (READ-ONLY)</a:t>
+            </a:r>
+            <a:br/>
+            <a:r>
+              <a:t>   Investigates Context  →  Evaluates Constraints  →  Outputs Structured Recommendation</a:t>
+            </a:r>
+            <a:br/>
+            <a:r>
+              <a:t>   ═══════════════════════════════════════════════════════════════════════════════════════</a:t>
+            </a:r>
+            <a:br/>
+            <a:r>
+              <a:t>   MANDATORY SAFETY BOUNDARY: FINANCIAL POLICY ENGINE</a:t>
+            </a:r>
+            <a:br/>
+            <a:r>
+              <a:t>   ═══════════════════════════════════════════════════════════════════════════════════════</a:t>
+            </a:r>
+            <a:br/>
+            <a:r>
+              <a:t>2. DETERMINISTIC AUTHORIZATION &amp; EXECUTION LAYER</a:t>
+            </a:r>
+            <a:br/>
+            <a:r>
+              <a:t>   • Policy Gate Check: Validates retry limits, merchant SLA window, and allowed strategies</a:t>
+            </a:r>
+            <a:br/>
+            <a:r>
+              <a:t>   • Pre-Execution Revalidation: Verifies authoritative DB state (halts if already paid)</a:t>
+            </a:r>
+            <a:br/>
+            <a:r>
+              <a:t>   • Redis Distributed Lock: SET NX EX ensures exclusive worker authorization</a:t>
+            </a:r>
+            <a:br/>
+            <a:r>
+              <a:t>   • PostgreSQL Idempotency Barrier: UNIQUE(idempotency_key) guarantees exactly-once execution</a:t>
+            </a:r>
+            <a:br/>
+            <a:r>
+              <a:t>   • Outcome Verification: Reconciles settlement response &amp; appends cryptographic audit trace</a:t>
+            </a:r>
+          </a:p>
+        </p:txBody>
+      </p:sp>
+      <p:sp>
+        <p:nvSpPr>
+          <p:cNvPr id="8" name="Rounded Rectangle 7"/>
+          <p:cNvSpPr/>
+          <p:nvPr/>
+        </p:nvSpPr>
+        <p:spPr>
+          <a:xfrm>
+            <a:off x="731520" y="4983480"/>
+            <a:ext cx="3383280" cy="1280160"/>
           </a:xfrm>
           <a:prstGeom prst="roundRect">
             <a:avLst/>
@@ -7815,7 +8090,7 @@
           </a:solidFill>
           <a:ln w="12700">
             <a:solidFill>
-              <a:srgbClr val="F59E0B"/>
+              <a:srgbClr val="1E293B"/>
             </a:solidFill>
           </a:ln>
         </p:spPr>
@@ -7843,14 +8118,14 @@
       </p:sp>
       <p:sp>
         <p:nvSpPr>
-          <p:cNvPr id="7" name="TextBox 6"/>
+          <p:cNvPr id="9" name="TextBox 8"/>
           <p:cNvSpPr txBox="1"/>
           <p:nvPr/>
         </p:nvSpPr>
         <p:spPr>
           <a:xfrm>
-            <a:off x="1005840" y="2011680"/>
-            <a:ext cx="4663440" cy="3749040"/>
+            <a:off x="896112" y="5093208"/>
+            <a:ext cx="3054096" cy="1060704"/>
           </a:xfrm>
           <a:prstGeom prst="rect">
             <a:avLst/>
@@ -7864,20 +8139,20 @@
           <a:lstStyle/>
           <a:p>
             <a:pPr>
-              <a:defRPr sz="1300" b="1">
-                <a:solidFill>
-                  <a:srgbClr val="F59E0B"/>
-                </a:solidFill>
-                <a:latin typeface="Segoe UI"/>
-              </a:defRPr>
-            </a:pPr>
-            <a:r>
-              <a:t>EDGE CASE 1: STATE INVERSION</a:t>
-            </a:r>
-          </a:p>
-          <a:p>
-            <a:pPr>
-              <a:defRPr sz="1100" i="1">
+              <a:defRPr sz="1100" b="1">
+                <a:solidFill>
+                  <a:srgbClr val="06B6D4"/>
+                </a:solidFill>
+                <a:latin typeface="Segoe UI"/>
+              </a:defRPr>
+            </a:pPr>
+            <a:r>
+              <a:t>🧠 INTELLIGENCE</a:t>
+            </a:r>
+          </a:p>
+          <a:p>
+            <a:pPr>
+              <a:defRPr sz="1050" b="1">
                 <a:solidFill>
                   <a:srgbClr val="FFFFFF"/>
                 </a:solidFill>
@@ -7885,13 +8160,12 @@
               </a:defRPr>
             </a:pPr>
             <a:r>
-              <a:t>Payment succeeds while recovery is waiting in queue.</a:t>
-            </a:r>
-          </a:p>
-          <a:p>
-            <a:br/>
-            <a:pPr>
-              <a:defRPr sz="1000">
+              <a:t>AI Handles Ambiguity</a:t>
+            </a:r>
+          </a:p>
+          <a:p>
+            <a:pPr>
+              <a:defRPr sz="900">
                 <a:solidFill>
                   <a:srgbClr val="94A3B8"/>
                 </a:solidFill>
@@ -7899,47 +8173,21 @@
               </a:defRPr>
             </a:pPr>
             <a:r>
-              <a:t>1. T0: Payment attempt fails on banking rail.</a:t>
-            </a:r>
-            <a:br/>
-            <a:r>
-              <a:t>2. T1: Recovery orchestrator schedules a retry for T + 60s.</a:t>
-            </a:r>
-            <a:br/>
-            <a:r>
-              <a:t>3. T2: Customer re-enters checkout and pays successfully via UPI!</a:t>
-            </a:r>
-            <a:br/>
-            <a:r>
-              <a:t>4. T3: Scheduled recovery worker wakes up to retry original payment.</a:t>
-            </a:r>
-            <a:br/>
-            <a:br/>
-            <a:r>
-              <a:t>THE CATASTROPHIC RISK: Double debiting the customer!</a:t>
-            </a:r>
-            <a:br/>
-            <a:br/>
-            <a:r>
-              <a:t>IRO DEFENSE MECHANISM: Authoritative Pre-Execution Revalidation.</a:t>
-            </a:r>
-            <a:br/>
-            <a:r>
-              <a:t>Before acquiring locks or initiating payment APIs, IRO queries the source-of-truth payment state. If status == SUCCESS, recovery is stopped immediately with zero action.</a:t>
-            </a:r>
-          </a:p>
-        </p:txBody>
-      </p:sp>
-      <p:sp>
-        <p:nvSpPr>
-          <p:cNvPr id="8" name="Rounded Rectangle 7"/>
+              <a:t>Synthesizes multi-variable context across rails, merchants, and failure codes.</a:t>
+            </a:r>
+          </a:p>
+        </p:txBody>
+      </p:sp>
+      <p:sp>
+        <p:nvSpPr>
+          <p:cNvPr id="10" name="Rounded Rectangle 9"/>
           <p:cNvSpPr/>
           <p:nvPr/>
         </p:nvSpPr>
         <p:spPr>
           <a:xfrm>
-            <a:off x="6217920" y="1737360"/>
-            <a:ext cx="5212080" cy="4297680"/>
+            <a:off x="4389120" y="4983480"/>
+            <a:ext cx="3383280" cy="1280160"/>
           </a:xfrm>
           <a:prstGeom prst="roundRect">
             <a:avLst/>
@@ -7949,7 +8197,7 @@
           </a:solidFill>
           <a:ln w="12700">
             <a:solidFill>
-              <a:srgbClr val="2563EB"/>
+              <a:srgbClr val="1E293B"/>
             </a:solidFill>
           </a:ln>
         </p:spPr>
@@ -7977,14 +8225,14 @@
       </p:sp>
       <p:sp>
         <p:nvSpPr>
-          <p:cNvPr id="9" name="TextBox 8"/>
+          <p:cNvPr id="11" name="TextBox 10"/>
           <p:cNvSpPr txBox="1"/>
           <p:nvPr/>
         </p:nvSpPr>
         <p:spPr>
           <a:xfrm>
-            <a:off x="6492240" y="2011680"/>
-            <a:ext cx="4663440" cy="3749040"/>
+            <a:off x="4553712" y="5093208"/>
+            <a:ext cx="3054096" cy="1060704"/>
           </a:xfrm>
           <a:prstGeom prst="rect">
             <a:avLst/>
@@ -7998,7 +8246,114 @@
           <a:lstStyle/>
           <a:p>
             <a:pPr>
-              <a:defRPr sz="1300" b="1">
+              <a:defRPr sz="1100" b="1">
+                <a:solidFill>
+                  <a:srgbClr val="10B981"/>
+                </a:solidFill>
+                <a:latin typeface="Segoe UI"/>
+              </a:defRPr>
+            </a:pPr>
+            <a:r>
+              <a:t>🛡️ SAFETY</a:t>
+            </a:r>
+          </a:p>
+          <a:p>
+            <a:pPr>
+              <a:defRPr sz="1050" b="1">
+                <a:solidFill>
+                  <a:srgbClr val="FFFFFF"/>
+                </a:solidFill>
+                <a:latin typeface="Segoe UI"/>
+              </a:defRPr>
+            </a:pPr>
+            <a:r>
+              <a:t>Policies Control Money</a:t>
+            </a:r>
+          </a:p>
+          <a:p>
+            <a:pPr>
+              <a:defRPr sz="900">
+                <a:solidFill>
+                  <a:srgbClr val="94A3B8"/>
+                </a:solidFill>
+                <a:latin typeface="Segoe UI"/>
+              </a:defRPr>
+            </a:pPr>
+            <a:r>
+              <a:t>Deterministic rules independently verify every action. Zero hallucinated debits.</a:t>
+            </a:r>
+          </a:p>
+        </p:txBody>
+      </p:sp>
+      <p:sp>
+        <p:nvSpPr>
+          <p:cNvPr id="12" name="Rounded Rectangle 11"/>
+          <p:cNvSpPr/>
+          <p:nvPr/>
+        </p:nvSpPr>
+        <p:spPr>
+          <a:xfrm>
+            <a:off x="8046720" y="4983480"/>
+            <a:ext cx="3383280" cy="1280160"/>
+          </a:xfrm>
+          <a:prstGeom prst="roundRect">
+            <a:avLst/>
+          </a:prstGeom>
+          <a:solidFill>
+            <a:srgbClr val="0E172E"/>
+          </a:solidFill>
+          <a:ln w="12700">
+            <a:solidFill>
+              <a:srgbClr val="1E293B"/>
+            </a:solidFill>
+          </a:ln>
+        </p:spPr>
+        <p:style>
+          <a:lnRef idx="1">
+            <a:schemeClr val="accent1"/>
+          </a:lnRef>
+          <a:fillRef idx="3">
+            <a:schemeClr val="accent1"/>
+          </a:fillRef>
+          <a:effectRef idx="2">
+            <a:schemeClr val="accent1"/>
+          </a:effectRef>
+          <a:fontRef idx="minor">
+            <a:schemeClr val="lt1"/>
+          </a:fontRef>
+        </p:style>
+        <p:txBody>
+          <a:bodyPr rtlCol="0" anchor="ctr"/>
+          <a:lstStyle/>
+          <a:p>
+            <a:pPr algn="ctr"/>
+          </a:p>
+        </p:txBody>
+      </p:sp>
+      <p:sp>
+        <p:nvSpPr>
+          <p:cNvPr id="13" name="TextBox 12"/>
+          <p:cNvSpPr txBox="1"/>
+          <p:nvPr/>
+        </p:nvSpPr>
+        <p:spPr>
+          <a:xfrm>
+            <a:off x="8211312" y="5093208"/>
+            <a:ext cx="3054096" cy="1060704"/>
+          </a:xfrm>
+          <a:prstGeom prst="rect">
+            <a:avLst/>
+          </a:prstGeom>
+          <a:noFill/>
+        </p:spPr>
+        <p:txBody>
+          <a:bodyPr wrap="none">
+            <a:spAutoFit/>
+          </a:bodyPr>
+          <a:lstStyle/>
+          <a:p>
+            <a:pPr>
+              <a:defRPr sz="1100" b="1">
                 <a:solidFill>
                   <a:srgbClr val="60A5FA"/>
                 </a:solidFill>
@@ -8006,12 +8361,12 @@
               </a:defRPr>
             </a:pPr>
             <a:r>
-              <a:t>EDGE CASE 2: TIMEOUT AMBIGUITY</a:t>
-            </a:r>
-          </a:p>
-          <a:p>
-            <a:pPr>
-              <a:defRPr sz="1100" i="1">
+              <a:t>⚙️ RELIABILITY</a:t>
+            </a:r>
+          </a:p>
+          <a:p>
+            <a:pPr>
+              <a:defRPr sz="1050" b="1">
                 <a:solidFill>
                   <a:srgbClr val="FFFFFF"/>
                 </a:solidFill>
@@ -8019,13 +8374,12 @@
               </a:defRPr>
             </a:pPr>
             <a:r>
-              <a:t>A timeout does not mean the payment failed.</a:t>
-            </a:r>
-          </a:p>
-          <a:p>
-            <a:br/>
-            <a:pPr>
-              <a:defRPr sz="1000">
+              <a:t>Distributed Invariants</a:t>
+            </a:r>
+          </a:p>
+          <a:p>
+            <a:pPr>
+              <a:defRPr sz="900">
                 <a:solidFill>
                   <a:srgbClr val="94A3B8"/>
                 </a:solidFill>
@@ -8033,29 +8387,7 @@
               </a:defRPr>
             </a:pPr>
             <a:r>
-              <a:t>1. Acquirer gateway drops connection after 15,000ms.</a:t>
-            </a:r>
-            <a:br/>
-            <a:r>
-              <a:t>2. Did the customer's bank debit the money? Unknown.</a:t>
-            </a:r>
-            <a:br/>
-            <a:r>
-              <a:t>3. Did the merchant capture the transaction? Unknown.</a:t>
-            </a:r>
-            <a:br/>
-            <a:br/>
-            <a:r>
-              <a:t>THE CATASTROPHIC RISK: Blindly retrying creates a duplicate charge while the bank is still processing attempt #1.</a:t>
-            </a:r>
-            <a:br/>
-            <a:br/>
-            <a:r>
-              <a:t>IRO DEFENSE MECHANISM: Hold for Reconciliation.</a:t>
-            </a:r>
-            <a:br/>
-            <a:r>
-              <a:t>IRO classifies timeouts as AMBIGUOUS_IN_FLIGHT. Instead of immediate retry, the case enters a holding state with automated polling against the bank settlement/status API.</a:t>
+              <a:t>Redis locks + DB idempotency eliminate race conditions and duplicate executions.</a:t>
             </a:r>
           </a:p>
         </p:txBody>
@@ -8152,7 +8484,7 @@
               </a:defRPr>
             </a:pPr>
             <a:r>
-              <a:t>05. AI INFRASTRUCTURE &amp; OPERATIONS</a:t>
+              <a:t>05. TECHNICAL ARCHITECTURE</a:t>
             </a:r>
           </a:p>
         </p:txBody>
@@ -8188,7 +8520,7 @@
               </a:defRPr>
             </a:pPr>
             <a:r>
-              <a:t>AI as Infrastructure: Tiered Routing &amp; L7 Scaling</a:t>
+              <a:t>Technology Stack: Organized by Responsibility</a:t>
             </a:r>
           </a:p>
         </p:txBody>
@@ -8224,7 +8556,7 @@
               </a:defRPr>
             </a:pPr>
             <a:r>
-              <a:t>The goal is not to use more AI. It is to use exactly as much intelligence as the decision requires.</a:t>
+              <a:t>A production-grade distributed architecture built for low-latency payment operations.</a:t>
             </a:r>
           </a:p>
         </p:txBody>
@@ -8238,7 +8570,7 @@
         <p:spPr>
           <a:xfrm>
             <a:off x="731520" y="1737360"/>
-            <a:ext cx="10698480" cy="1417320"/>
+            <a:ext cx="3383280" cy="1645920"/>
           </a:xfrm>
           <a:prstGeom prst="roundRect">
             <a:avLst/>
@@ -8282,8 +8614,8 @@
         </p:nvSpPr>
         <p:spPr>
           <a:xfrm>
-            <a:off x="1005840" y="1874520"/>
-            <a:ext cx="10149840" cy="1234440"/>
+            <a:off x="896112" y="1874520"/>
+            <a:ext cx="3054096" cy="1371600"/>
           </a:xfrm>
           <a:prstGeom prst="rect">
             <a:avLst/>
@@ -8297,7 +8629,7 @@
           <a:lstStyle/>
           <a:p>
             <a:pPr>
-              <a:defRPr sz="1200" b="1">
+              <a:defRPr sz="1000" b="1">
                 <a:solidFill>
                   <a:srgbClr val="06B6D4"/>
                 </a:solidFill>
@@ -8305,12 +8637,12 @@
               </a:defRPr>
             </a:pPr>
             <a:r>
-              <a:t>LAYER 1: MODEL ROUTER (WHAT TO RUN?)</a:t>
-            </a:r>
-          </a:p>
-          <a:p>
-            <a:pPr>
-              <a:defRPr sz="1000" i="1">
+              <a:t>EVENT BACKBONE</a:t>
+            </a:r>
+          </a:p>
+          <a:p>
+            <a:pPr>
+              <a:defRPr sz="1300" b="1">
                 <a:solidFill>
                   <a:srgbClr val="FFFFFF"/>
                 </a:solidFill>
@@ -8318,7 +8650,7 @@
               </a:defRPr>
             </a:pPr>
             <a:r>
-              <a:t>Evaluates task complexity and routes to right-sized inference tiers.</a:t>
+              <a:t>Kafka Event Contracts</a:t>
             </a:r>
           </a:p>
           <a:p>
@@ -8331,11 +8663,7 @@
               </a:defRPr>
             </a:pPr>
             <a:r>
-              <a:t>• Fast Classification Tier: Simple classification (timeout vs decline, route matching). 5ms latency, $0.0005/1k tokens.</a:t>
-            </a:r>
-            <a:br/>
-            <a:r>
-              <a:t>• Deep Reasoning Tier: Multi-attempt failure analysis, merchant contract reconciliation. 25ms latency, deep reasoning.</a:t>
+              <a:t>Decoupled asynchronous event ingestion, resilient dead-letter queues.</a:t>
             </a:r>
           </a:p>
         </p:txBody>
@@ -8348,8 +8676,8 @@
         </p:nvSpPr>
         <p:spPr>
           <a:xfrm>
-            <a:off x="731520" y="3337560"/>
-            <a:ext cx="10698480" cy="1417320"/>
+            <a:off x="4389120" y="1737360"/>
+            <a:ext cx="3383280" cy="1645920"/>
           </a:xfrm>
           <a:prstGeom prst="roundRect">
             <a:avLst/>
@@ -8393,8 +8721,8 @@
         </p:nvSpPr>
         <p:spPr>
           <a:xfrm>
-            <a:off x="1005840" y="3474720"/>
-            <a:ext cx="10149840" cy="1234440"/>
+            <a:off x="4553712" y="1874520"/>
+            <a:ext cx="3054096" cy="1371600"/>
           </a:xfrm>
           <a:prstGeom prst="rect">
             <a:avLst/>
@@ -8408,7 +8736,7 @@
           <a:lstStyle/>
           <a:p>
             <a:pPr>
-              <a:defRPr sz="1200" b="1">
+              <a:defRPr sz="1000" b="1">
                 <a:solidFill>
                   <a:srgbClr val="60A5FA"/>
                 </a:solidFill>
@@ -8416,12 +8744,12 @@
               </a:defRPr>
             </a:pPr>
             <a:r>
-              <a:t>LAYER 2: L7 RECOVERY LOAD BALANCER (WHERE TO RUN?)</a:t>
-            </a:r>
-          </a:p>
-          <a:p>
-            <a:pPr>
-              <a:defRPr sz="1000" i="1">
+              <a:t>APPLICATION CORE</a:t>
+            </a:r>
+          </a:p>
+          <a:p>
+            <a:pPr>
+              <a:defRPr sz="1300" b="1">
                 <a:solidFill>
                   <a:srgbClr val="FFFFFF"/>
                 </a:solidFill>
@@ -8429,7 +8757,7 @@
               </a:defRPr>
             </a:pPr>
             <a:r>
-              <a:t>Health-aware dispatching across distributed specialist worker instances.</a:t>
+              <a:t>Python 3.12 + FastAPI</a:t>
             </a:r>
           </a:p>
           <a:p>
@@ -8442,15 +8770,7 @@
               </a:defRPr>
             </a:pPr>
             <a:r>
-              <a:t>• Active health monitoring: Tracks instance states (HEALTHY, DEGRADED, DOWN).</a:t>
-            </a:r>
-            <a:br/>
-            <a:r>
-              <a:t>• Telemetry-driven load balancing: Dispatches to least-loaded healthy specialist container.</a:t>
-            </a:r>
-            <a:br/>
-            <a:r>
-              <a:t>• Fast circuit breaker: Automatically trips if specialist latency exceeds 150ms SLA.</a:t>
+              <a:t>High-performance async ASGI runtime with strict Pydantic v2 validation.</a:t>
             </a:r>
           </a:p>
         </p:txBody>
@@ -8463,8 +8783,8 @@
         </p:nvSpPr>
         <p:spPr>
           <a:xfrm>
-            <a:off x="731520" y="4937760"/>
-            <a:ext cx="10698480" cy="1417320"/>
+            <a:off x="8046720" y="1737360"/>
+            <a:ext cx="3383280" cy="1645920"/>
           </a:xfrm>
           <a:prstGeom prst="roundRect">
             <a:avLst/>
@@ -8508,8 +8828,8 @@
         </p:nvSpPr>
         <p:spPr>
           <a:xfrm>
-            <a:off x="1005840" y="5074920"/>
-            <a:ext cx="10149840" cy="1234440"/>
+            <a:off x="8211312" y="1874520"/>
+            <a:ext cx="3054096" cy="1371600"/>
           </a:xfrm>
           <a:prstGeom prst="rect">
             <a:avLst/>
@@ -8523,7 +8843,221 @@
           <a:lstStyle/>
           <a:p>
             <a:pPr>
-              <a:defRPr sz="1200" b="1">
+              <a:defRPr sz="1000" b="1">
+                <a:solidFill>
+                  <a:srgbClr val="2563EB"/>
+                </a:solidFill>
+                <a:latin typeface="Segoe UI"/>
+              </a:defRPr>
+            </a:pPr>
+            <a:r>
+              <a:t>PERSISTENCE</a:t>
+            </a:r>
+          </a:p>
+          <a:p>
+            <a:pPr>
+              <a:defRPr sz="1300" b="1">
+                <a:solidFill>
+                  <a:srgbClr val="FFFFFF"/>
+                </a:solidFill>
+                <a:latin typeface="Segoe UI"/>
+              </a:defRPr>
+            </a:pPr>
+            <a:r>
+              <a:t>PostgreSQL 16</a:t>
+            </a:r>
+          </a:p>
+          <a:p>
+            <a:pPr>
+              <a:defRPr sz="950">
+                <a:solidFill>
+                  <a:srgbClr val="94A3B8"/>
+                </a:solidFill>
+                <a:latin typeface="Segoe UI"/>
+              </a:defRPr>
+            </a:pPr>
+            <a:r>
+              <a:t>ACID transactional state machine &amp; immutable cryptographic audit ledger.</a:t>
+            </a:r>
+          </a:p>
+        </p:txBody>
+      </p:sp>
+      <p:sp>
+        <p:nvSpPr>
+          <p:cNvPr id="12" name="Rounded Rectangle 11"/>
+          <p:cNvSpPr/>
+          <p:nvPr/>
+        </p:nvSpPr>
+        <p:spPr>
+          <a:xfrm>
+            <a:off x="731520" y="3566160"/>
+            <a:ext cx="3383280" cy="1645920"/>
+          </a:xfrm>
+          <a:prstGeom prst="roundRect">
+            <a:avLst/>
+          </a:prstGeom>
+          <a:solidFill>
+            <a:srgbClr val="0E172E"/>
+          </a:solidFill>
+          <a:ln w="12700">
+            <a:solidFill>
+              <a:srgbClr val="1E293B"/>
+            </a:solidFill>
+          </a:ln>
+        </p:spPr>
+        <p:style>
+          <a:lnRef idx="1">
+            <a:schemeClr val="accent1"/>
+          </a:lnRef>
+          <a:fillRef idx="3">
+            <a:schemeClr val="accent1"/>
+          </a:fillRef>
+          <a:effectRef idx="2">
+            <a:schemeClr val="accent1"/>
+          </a:effectRef>
+          <a:fontRef idx="minor">
+            <a:schemeClr val="lt1"/>
+          </a:fontRef>
+        </p:style>
+        <p:txBody>
+          <a:bodyPr rtlCol="0" anchor="ctr"/>
+          <a:lstStyle/>
+          <a:p>
+            <a:pPr algn="ctr"/>
+          </a:p>
+        </p:txBody>
+      </p:sp>
+      <p:sp>
+        <p:nvSpPr>
+          <p:cNvPr id="13" name="TextBox 12"/>
+          <p:cNvSpPr txBox="1"/>
+          <p:nvPr/>
+        </p:nvSpPr>
+        <p:spPr>
+          <a:xfrm>
+            <a:off x="896112" y="3703320"/>
+            <a:ext cx="3054096" cy="1371600"/>
+          </a:xfrm>
+          <a:prstGeom prst="rect">
+            <a:avLst/>
+          </a:prstGeom>
+          <a:noFill/>
+        </p:spPr>
+        <p:txBody>
+          <a:bodyPr wrap="none">
+            <a:spAutoFit/>
+          </a:bodyPr>
+          <a:lstStyle/>
+          <a:p>
+            <a:pPr>
+              <a:defRPr sz="1000" b="1">
+                <a:solidFill>
+                  <a:srgbClr val="F59E0B"/>
+                </a:solidFill>
+                <a:latin typeface="Segoe UI"/>
+              </a:defRPr>
+            </a:pPr>
+            <a:r>
+              <a:t>COORDINATION</a:t>
+            </a:r>
+          </a:p>
+          <a:p>
+            <a:pPr>
+              <a:defRPr sz="1300" b="1">
+                <a:solidFill>
+                  <a:srgbClr val="FFFFFF"/>
+                </a:solidFill>
+                <a:latin typeface="Segoe UI"/>
+              </a:defRPr>
+            </a:pPr>
+            <a:r>
+              <a:t>Redis 7 Distributed Locks</a:t>
+            </a:r>
+          </a:p>
+          <a:p>
+            <a:pPr>
+              <a:defRPr sz="950">
+                <a:solidFill>
+                  <a:srgbClr val="94A3B8"/>
+                </a:solidFill>
+                <a:latin typeface="Segoe UI"/>
+              </a:defRPr>
+            </a:pPr>
+            <a:r>
+              <a:t>Atomic SET NX EX locks with Lua release; prevents concurrent worker collisions.</a:t>
+            </a:r>
+          </a:p>
+        </p:txBody>
+      </p:sp>
+      <p:sp>
+        <p:nvSpPr>
+          <p:cNvPr id="14" name="Rounded Rectangle 13"/>
+          <p:cNvSpPr/>
+          <p:nvPr/>
+        </p:nvSpPr>
+        <p:spPr>
+          <a:xfrm>
+            <a:off x="4389120" y="3566160"/>
+            <a:ext cx="3383280" cy="1645920"/>
+          </a:xfrm>
+          <a:prstGeom prst="roundRect">
+            <a:avLst/>
+          </a:prstGeom>
+          <a:solidFill>
+            <a:srgbClr val="0E172E"/>
+          </a:solidFill>
+          <a:ln w="12700">
+            <a:solidFill>
+              <a:srgbClr val="1E293B"/>
+            </a:solidFill>
+          </a:ln>
+        </p:spPr>
+        <p:style>
+          <a:lnRef idx="1">
+            <a:schemeClr val="accent1"/>
+          </a:lnRef>
+          <a:fillRef idx="3">
+            <a:schemeClr val="accent1"/>
+          </a:fillRef>
+          <a:effectRef idx="2">
+            <a:schemeClr val="accent1"/>
+          </a:effectRef>
+          <a:fontRef idx="minor">
+            <a:schemeClr val="lt1"/>
+          </a:fontRef>
+        </p:style>
+        <p:txBody>
+          <a:bodyPr rtlCol="0" anchor="ctr"/>
+          <a:lstStyle/>
+          <a:p>
+            <a:pPr algn="ctr"/>
+          </a:p>
+        </p:txBody>
+      </p:sp>
+      <p:sp>
+        <p:nvSpPr>
+          <p:cNvPr id="15" name="TextBox 14"/>
+          <p:cNvSpPr txBox="1"/>
+          <p:nvPr/>
+        </p:nvSpPr>
+        <p:spPr>
+          <a:xfrm>
+            <a:off x="4553712" y="3703320"/>
+            <a:ext cx="3054096" cy="1371600"/>
+          </a:xfrm>
+          <a:prstGeom prst="rect">
+            <a:avLst/>
+          </a:prstGeom>
+          <a:noFill/>
+        </p:spPr>
+        <p:txBody>
+          <a:bodyPr wrap="none">
+            <a:spAutoFit/>
+          </a:bodyPr>
+          <a:lstStyle/>
+          <a:p>
+            <a:pPr>
+              <a:defRPr sz="1000" b="1">
                 <a:solidFill>
                   <a:srgbClr val="10B981"/>
                 </a:solidFill>
@@ -8531,12 +9065,12 @@
               </a:defRPr>
             </a:pPr>
             <a:r>
-              <a:t>LAYER 3: ZERO-AI DETERMINISTIC BYPASS (WHEN NOT TO RUN?)</a:t>
-            </a:r>
-          </a:p>
-          <a:p>
-            <a:pPr>
-              <a:defRPr sz="1000" i="1">
+              <a:t>AI TEAMMATE</a:t>
+            </a:r>
+          </a:p>
+          <a:p>
+            <a:pPr>
+              <a:defRPr sz="1300" b="1">
                 <a:solidFill>
                   <a:srgbClr val="FFFFFF"/>
                 </a:solidFill>
@@ -8544,7 +9078,7 @@
               </a:defRPr>
             </a:pPr>
             <a:r>
-              <a:t>The most scalable AI request is the one you never make.</a:t>
+              <a:t>LLM Gateway + Model Router</a:t>
             </a:r>
           </a:p>
           <a:p>
@@ -8557,15 +9091,195 @@
               </a:defRPr>
             </a:pPr>
             <a:r>
-              <a:t>• 68% of payment failures resolved with ZERO AI inference tokens.</a:t>
-            </a:r>
-            <a:br/>
-            <a:r>
-              <a:t>• Direct fallback: If all AI instances degrade or fail, system operates cleanly on deterministic rules.</a:t>
-            </a:r>
-            <a:br/>
-            <a:r>
-              <a:t>• Eliminates external API dependencies from the critical payment authorization path.</a:t>
+              <a:t>Tiered model routing (5ms Fast Classifier vs 25ms Deep Reasoning Specialist).</a:t>
+            </a:r>
+          </a:p>
+        </p:txBody>
+      </p:sp>
+      <p:sp>
+        <p:nvSpPr>
+          <p:cNvPr id="16" name="Rounded Rectangle 15"/>
+          <p:cNvSpPr/>
+          <p:nvPr/>
+        </p:nvSpPr>
+        <p:spPr>
+          <a:xfrm>
+            <a:off x="8046720" y="3566160"/>
+            <a:ext cx="3383280" cy="1645920"/>
+          </a:xfrm>
+          <a:prstGeom prst="roundRect">
+            <a:avLst/>
+          </a:prstGeom>
+          <a:solidFill>
+            <a:srgbClr val="0E172E"/>
+          </a:solidFill>
+          <a:ln w="12700">
+            <a:solidFill>
+              <a:srgbClr val="1E293B"/>
+            </a:solidFill>
+          </a:ln>
+        </p:spPr>
+        <p:style>
+          <a:lnRef idx="1">
+            <a:schemeClr val="accent1"/>
+          </a:lnRef>
+          <a:fillRef idx="3">
+            <a:schemeClr val="accent1"/>
+          </a:fillRef>
+          <a:effectRef idx="2">
+            <a:schemeClr val="accent1"/>
+          </a:effectRef>
+          <a:fontRef idx="minor">
+            <a:schemeClr val="lt1"/>
+          </a:fontRef>
+        </p:style>
+        <p:txBody>
+          <a:bodyPr rtlCol="0" anchor="ctr"/>
+          <a:lstStyle/>
+          <a:p>
+            <a:pPr algn="ctr"/>
+          </a:p>
+        </p:txBody>
+      </p:sp>
+      <p:sp>
+        <p:nvSpPr>
+          <p:cNvPr id="17" name="TextBox 16"/>
+          <p:cNvSpPr txBox="1"/>
+          <p:nvPr/>
+        </p:nvSpPr>
+        <p:spPr>
+          <a:xfrm>
+            <a:off x="8211312" y="3703320"/>
+            <a:ext cx="3054096" cy="1371600"/>
+          </a:xfrm>
+          <a:prstGeom prst="rect">
+            <a:avLst/>
+          </a:prstGeom>
+          <a:noFill/>
+        </p:spPr>
+        <p:txBody>
+          <a:bodyPr wrap="none">
+            <a:spAutoFit/>
+          </a:bodyPr>
+          <a:lstStyle/>
+          <a:p>
+            <a:pPr>
+              <a:defRPr sz="1000" b="1">
+                <a:solidFill>
+                  <a:srgbClr val="EF4444"/>
+                </a:solidFill>
+                <a:latin typeface="Segoe UI"/>
+              </a:defRPr>
+            </a:pPr>
+            <a:r>
+              <a:t>RELIABILITY &amp; SAFETY</a:t>
+            </a:r>
+          </a:p>
+          <a:p>
+            <a:pPr>
+              <a:defRPr sz="1300" b="1">
+                <a:solidFill>
+                  <a:srgbClr val="FFFFFF"/>
+                </a:solidFill>
+                <a:latin typeface="Segoe UI"/>
+              </a:defRPr>
+            </a:pPr>
+            <a:r>
+              <a:t>Policy Engine + FSM</a:t>
+            </a:r>
+          </a:p>
+          <a:p>
+            <a:pPr>
+              <a:defRPr sz="950">
+                <a:solidFill>
+                  <a:srgbClr val="94A3B8"/>
+                </a:solidFill>
+                <a:latin typeface="Segoe UI"/>
+              </a:defRPr>
+            </a:pPr>
+            <a:r>
+              <a:t>Deterministic financial policy guards and recovery finite state machines.</a:t>
+            </a:r>
+          </a:p>
+        </p:txBody>
+      </p:sp>
+      <p:sp>
+        <p:nvSpPr>
+          <p:cNvPr id="18" name="Rounded Rectangle 17"/>
+          <p:cNvSpPr/>
+          <p:nvPr/>
+        </p:nvSpPr>
+        <p:spPr>
+          <a:xfrm>
+            <a:off x="731520" y="5440680"/>
+            <a:ext cx="10698480" cy="822960"/>
+          </a:xfrm>
+          <a:prstGeom prst="roundRect">
+            <a:avLst/>
+          </a:prstGeom>
+          <a:solidFill>
+            <a:srgbClr val="132247"/>
+          </a:solidFill>
+          <a:ln w="12700">
+            <a:solidFill>
+              <a:srgbClr val="10B981"/>
+            </a:solidFill>
+          </a:ln>
+        </p:spPr>
+        <p:style>
+          <a:lnRef idx="1">
+            <a:schemeClr val="accent1"/>
+          </a:lnRef>
+          <a:fillRef idx="3">
+            <a:schemeClr val="accent1"/>
+          </a:fillRef>
+          <a:effectRef idx="2">
+            <a:schemeClr val="accent1"/>
+          </a:effectRef>
+          <a:fontRef idx="minor">
+            <a:schemeClr val="lt1"/>
+          </a:fontRef>
+        </p:style>
+        <p:txBody>
+          <a:bodyPr rtlCol="0" anchor="ctr"/>
+          <a:lstStyle/>
+          <a:p>
+            <a:pPr algn="ctr"/>
+          </a:p>
+        </p:txBody>
+      </p:sp>
+      <p:sp>
+        <p:nvSpPr>
+          <p:cNvPr id="19" name="TextBox 18"/>
+          <p:cNvSpPr txBox="1"/>
+          <p:nvPr/>
+        </p:nvSpPr>
+        <p:spPr>
+          <a:xfrm>
+            <a:off x="1005840" y="5532120"/>
+            <a:ext cx="10149840" cy="640080"/>
+          </a:xfrm>
+          <a:prstGeom prst="rect">
+            <a:avLst/>
+          </a:prstGeom>
+          <a:noFill/>
+        </p:spPr>
+        <p:txBody>
+          <a:bodyPr wrap="none">
+            <a:spAutoFit/>
+          </a:bodyPr>
+          <a:lstStyle/>
+          <a:p>
+            <a:pPr>
+              <a:defRPr sz="1050" b="1">
+                <a:solidFill>
+                  <a:srgbClr val="FFFFFF"/>
+                </a:solidFill>
+                <a:latin typeface="Segoe UI"/>
+              </a:defRPr>
+            </a:pPr>
+            <a:r>
+              <a:t>VERIFIED PRODUCTION CODEBASE: 120 / 120 Pytest test suites passing across unit, integration, FSM, concurrency, and AI gateway modules.</a:t>
             </a:r>
           </a:p>
         </p:txBody>
@@ -8662,7 +9376,7 @@
               </a:defRPr>
             </a:pPr>
             <a:r>
-              <a:t>06. END-TO-END WALKTHROUGH</a:t>
+              <a:t>06. TANGIBLE CASE STUDY</a:t>
             </a:r>
           </a:p>
         </p:txBody>
@@ -8734,7 +9448,7 @@
               </a:defRPr>
             </a:pPr>
             <a:r>
-              <a:t>Tracing an ambiguous edge case from failure detection to safe financial settlement.</a:t>
+              <a:t>How the AI teammate investigates, reasons, and safely orchestrates a complex rail failover.</a:t>
             </a:r>
           </a:p>
         </p:txBody>
@@ -8748,7 +9462,7 @@
         <p:spPr>
           <a:xfrm>
             <a:off x="731520" y="1737360"/>
-            <a:ext cx="1993392" cy="4206240"/>
+            <a:ext cx="1993392" cy="4114800"/>
           </a:xfrm>
           <a:prstGeom prst="roundRect">
             <a:avLst/>
@@ -8793,7 +9507,7 @@
         <p:spPr>
           <a:xfrm>
             <a:off x="868680" y="1920240"/>
-            <a:ext cx="1719072" cy="3840480"/>
+            <a:ext cx="1719072" cy="3749040"/>
           </a:xfrm>
           <a:prstGeom prst="rect">
             <a:avLst/>
@@ -8815,7 +9529,7 @@
               </a:defRPr>
             </a:pPr>
             <a:r>
-              <a:t>1. FAILURE EVENT</a:t>
+              <a:t>1. FAILURE DETECTED</a:t>
             </a:r>
           </a:p>
           <a:p>
@@ -8842,7 +9556,7 @@
               </a:defRPr>
             </a:pPr>
             <a:r>
-              <a:t>Credit card attempt #2 fails on HDFC rail with GATEWAY_ERROR. Rail health drops to 38%.</a:t>
+              <a:t>Attempt #2 fails on HDFC Cards with GATEWAY_ERROR. Rail health score plummets to 38%.</a:t>
             </a:r>
           </a:p>
         </p:txBody>
@@ -8856,7 +9570,7 @@
         <p:spPr>
           <a:xfrm>
             <a:off x="2907792" y="1737360"/>
-            <a:ext cx="1993392" cy="4206240"/>
+            <a:ext cx="1993392" cy="4114800"/>
           </a:xfrm>
           <a:prstGeom prst="roundRect">
             <a:avLst/>
@@ -8901,7 +9615,7 @@
         <p:spPr>
           <a:xfrm>
             <a:off x="3044952" y="1920240"/>
-            <a:ext cx="1719072" cy="3840480"/>
+            <a:ext cx="1719072" cy="3749040"/>
           </a:xfrm>
           <a:prstGeom prst="rect">
             <a:avLst/>
@@ -8923,7 +9637,7 @@
               </a:defRPr>
             </a:pPr>
             <a:r>
-              <a:t>2. SPECIALIST INVESTIGATION</a:t>
+              <a:t>2. TEAMMATE INVESTIGATES</a:t>
             </a:r>
           </a:p>
           <a:p>
@@ -8936,7 +9650,7 @@
               </a:defRPr>
             </a:pPr>
             <a:r>
-              <a:t>Read-Only AI Analysis</a:t>
+              <a:t>6 Read-Only Tools</a:t>
             </a:r>
           </a:p>
           <a:p>
@@ -8950,7 +9664,7 @@
               </a:defRPr>
             </a:pPr>
             <a:r>
-              <a:t>Ambiguity detected. Specialist agent inspects route health &amp; merchant limits. (ZERO write access).</a:t>
+              <a:t>IRO Agent activates. Reads payment context, attempt sequence, route health &amp; merchant SLA.</a:t>
             </a:r>
           </a:p>
         </p:txBody>
@@ -8964,7 +9678,7 @@
         <p:spPr>
           <a:xfrm>
             <a:off x="5084064" y="1737360"/>
-            <a:ext cx="1993392" cy="4206240"/>
+            <a:ext cx="1993392" cy="4114800"/>
           </a:xfrm>
           <a:prstGeom prst="roundRect">
             <a:avLst/>
@@ -9009,7 +9723,7 @@
         <p:spPr>
           <a:xfrm>
             <a:off x="5221224" y="1920240"/>
-            <a:ext cx="1719072" cy="3840480"/>
+            <a:ext cx="1719072" cy="3749040"/>
           </a:xfrm>
           <a:prstGeom prst="rect">
             <a:avLst/>
@@ -9031,7 +9745,7 @@
               </a:defRPr>
             </a:pPr>
             <a:r>
-              <a:t>3. AI PROPOSAL</a:t>
+              <a:t>3. REASON &amp; RECOMMEND</a:t>
             </a:r>
           </a:p>
           <a:p>
@@ -9044,7 +9758,7 @@
               </a:defRPr>
             </a:pPr>
             <a:r>
-              <a:t>Recommend Route Switch</a:t>
+              <a:t>Route Switch Proposed</a:t>
             </a:r>
           </a:p>
           <a:p>
@@ -9058,7 +9772,7 @@
               </a:defRPr>
             </a:pPr>
             <a:r>
-              <a:t>Agent identifies ICICI rail is healthy (98.4%). Recommends SWITCH_ROUTE with 120s backoff.</a:t>
+              <a:t>Agent spots HDFC rail is failing, but ICICI is at 98.4% health. Recommends SWITCH_ROUTE.</a:t>
             </a:r>
           </a:p>
         </p:txBody>
@@ -9072,7 +9786,7 @@
         <p:spPr>
           <a:xfrm>
             <a:off x="7260336" y="1737360"/>
-            <a:ext cx="1993392" cy="4206240"/>
+            <a:ext cx="1993392" cy="4114800"/>
           </a:xfrm>
           <a:prstGeom prst="roundRect">
             <a:avLst/>
@@ -9117,7 +9831,7 @@
         <p:spPr>
           <a:xfrm>
             <a:off x="7397496" y="1920240"/>
-            <a:ext cx="1719072" cy="3840480"/>
+            <a:ext cx="1719072" cy="3749040"/>
           </a:xfrm>
           <a:prstGeom prst="rect">
             <a:avLst/>
@@ -9139,7 +9853,7 @@
               </a:defRPr>
             </a:pPr>
             <a:r>
-              <a:t>4. POLICY ENGINE GATE</a:t>
+              <a:t>4. POLICY GATE PASSES</a:t>
             </a:r>
           </a:p>
           <a:p>
@@ -9152,7 +9866,7 @@
               </a:defRPr>
             </a:pPr>
             <a:r>
-              <a:t>Deterministic Validation</a:t>
+              <a:t>Deterministic Checks</a:t>
             </a:r>
           </a:p>
           <a:p>
@@ -9180,7 +9894,7 @@
         <p:spPr>
           <a:xfrm>
             <a:off x="9436608" y="1737360"/>
-            <a:ext cx="1993392" cy="4206240"/>
+            <a:ext cx="1993392" cy="4114800"/>
           </a:xfrm>
           <a:prstGeom prst="roundRect">
             <a:avLst/>
@@ -9225,7 +9939,7 @@
         <p:spPr>
           <a:xfrm>
             <a:off x="9573768" y="1920240"/>
-            <a:ext cx="1719072" cy="3840480"/>
+            <a:ext cx="1719072" cy="3749040"/>
           </a:xfrm>
           <a:prstGeom prst="rect">
             <a:avLst/>
@@ -9247,7 +9961,7 @@
               </a:defRPr>
             </a:pPr>
             <a:r>
-              <a:t>5. SAFE EXECUTION</a:t>
+              <a:t>5. SAFE ORCHESTRATION</a:t>
             </a:r>
           </a:p>
           <a:p>
@@ -9274,7 +9988,7 @@
               </a:defRPr>
             </a:pPr>
             <a:r>
-              <a:t>Redis TTL lock acquired, DB idempotency reserved, transaction captured on ICICI. ₹75,000 SAVED!</a:t>
+              <a:t>Redis lock acquired, idempotency reserved, payment captured on ICICI rail. ₹75,000 SAVED!</a:t>
             </a:r>
           </a:p>
         </p:txBody>
@@ -9371,7 +10085,7 @@
               </a:defRPr>
             </a:pPr>
             <a:r>
-              <a:t>07. EMPIRICAL EVALUATION</a:t>
+              <a:t>07. EMPIRICAL RESULTS &amp; VALIDATION</a:t>
             </a:r>
           </a:p>
         </p:txBody>
@@ -9407,7 +10121,7 @@
               </a:defRPr>
             </a:pPr>
             <a:r>
-              <a:t>Empirical Evaluation: 100 Synthetic Scenarios</a:t>
+              <a:t>Impact &amp; Benefits: 100-Case Synthetic Benchmark</a:t>
             </a:r>
           </a:p>
         </p:txBody>
@@ -9443,7 +10157,7 @@
               </a:defRPr>
             </a:pPr>
             <a:r>
-              <a:t>Head-to-head comparison of IRO vs. Naive Single-Rail Baseline on controlled synthetic payment data.</a:t>
+              <a:t>Rigorous empirical evaluation comparing IRO against a transparent naive single-rail baseline.</a:t>
             </a:r>
           </a:p>
         </p:txBody>
@@ -9457,7 +10171,7 @@
         <p:spPr>
           <a:xfrm>
             <a:off x="731520" y="1737360"/>
-            <a:ext cx="2468880" cy="1920240"/>
+            <a:ext cx="3383280" cy="2011680"/>
           </a:xfrm>
           <a:prstGeom prst="roundRect">
             <a:avLst/>
@@ -9501,8 +10215,8 @@
         </p:nvSpPr>
         <p:spPr>
           <a:xfrm>
-            <a:off x="896112" y="1874520"/>
-            <a:ext cx="2139696" cy="1920240"/>
+            <a:off x="914400" y="1901952"/>
+            <a:ext cx="3017520" cy="1737360"/>
           </a:xfrm>
           <a:prstGeom prst="rect">
             <a:avLst/>
@@ -9516,7 +10230,7 @@
           <a:lstStyle/>
           <a:p>
             <a:pPr>
-              <a:defRPr sz="1000" b="1">
+              <a:defRPr sz="1100" b="1">
                 <a:solidFill>
                   <a:srgbClr val="64748B"/>
                 </a:solidFill>
@@ -9529,7 +10243,7 @@
           </a:p>
           <a:p>
             <a:pPr>
-              <a:defRPr sz="1800" b="1">
+              <a:defRPr sz="2200" b="1">
                 <a:solidFill>
                   <a:srgbClr val="10B981"/>
                 </a:solidFill>
@@ -9542,7 +10256,7 @@
           </a:p>
           <a:p>
             <a:pPr>
-              <a:defRPr sz="1100">
+              <a:defRPr sz="1200">
                 <a:solidFill>
                   <a:srgbClr val="94A3B8"/>
                 </a:solidFill>
@@ -9555,7 +10269,7 @@
           </a:p>
           <a:p>
             <a:pPr>
-              <a:defRPr sz="950" b="1">
+              <a:defRPr sz="1050" b="1">
                 <a:solidFill>
                   <a:srgbClr val="FFFFFF"/>
                 </a:solidFill>
@@ -9576,8 +10290,8 @@
         </p:nvSpPr>
         <p:spPr>
           <a:xfrm>
-            <a:off x="3474720" y="1737360"/>
-            <a:ext cx="2468880" cy="1920240"/>
+            <a:off x="4389120" y="1737360"/>
+            <a:ext cx="3383280" cy="2011680"/>
           </a:xfrm>
           <a:prstGeom prst="roundRect">
             <a:avLst/>
@@ -9621,8 +10335,8 @@
         </p:nvSpPr>
         <p:spPr>
           <a:xfrm>
-            <a:off x="3639312" y="1874520"/>
-            <a:ext cx="2139696" cy="1920240"/>
+            <a:off x="4572000" y="1901952"/>
+            <a:ext cx="3017520" cy="1737360"/>
           </a:xfrm>
           <a:prstGeom prst="rect">
             <a:avLst/>
@@ -9636,7 +10350,7 @@
           <a:lstStyle/>
           <a:p>
             <a:pPr>
-              <a:defRPr sz="1000" b="1">
+              <a:defRPr sz="1100" b="1">
                 <a:solidFill>
                   <a:srgbClr val="64748B"/>
                 </a:solidFill>
@@ -9644,12 +10358,12 @@
               </a:defRPr>
             </a:pPr>
             <a:r>
-              <a:t>RECOVERED REVENUE</a:t>
-            </a:r>
-          </a:p>
-          <a:p>
-            <a:pPr>
-              <a:defRPr sz="1800" b="1">
+              <a:t>REVENUE RECOVERED</a:t>
+            </a:r>
+          </a:p>
+          <a:p>
+            <a:pPr>
+              <a:defRPr sz="2200" b="1">
                 <a:solidFill>
                   <a:srgbClr val="60A5FA"/>
                 </a:solidFill>
@@ -9662,7 +10376,7 @@
           </a:p>
           <a:p>
             <a:pPr>
-              <a:defRPr sz="1100">
+              <a:defRPr sz="1200">
                 <a:solidFill>
                   <a:srgbClr val="94A3B8"/>
                 </a:solidFill>
@@ -9675,7 +10389,7 @@
           </a:p>
           <a:p>
             <a:pPr>
-              <a:defRPr sz="950" b="1">
+              <a:defRPr sz="1050" b="1">
                 <a:solidFill>
                   <a:srgbClr val="FFFFFF"/>
                 </a:solidFill>
@@ -9696,8 +10410,8 @@
         </p:nvSpPr>
         <p:spPr>
           <a:xfrm>
-            <a:off x="6217920" y="1737360"/>
-            <a:ext cx="2468880" cy="1920240"/>
+            <a:off x="8046720" y="1737360"/>
+            <a:ext cx="3383280" cy="2011680"/>
           </a:xfrm>
           <a:prstGeom prst="roundRect">
             <a:avLst/>
@@ -9741,8 +10455,8 @@
         </p:nvSpPr>
         <p:spPr>
           <a:xfrm>
-            <a:off x="6382512" y="1874520"/>
-            <a:ext cx="2139696" cy="1920240"/>
+            <a:off x="8229600" y="1901952"/>
+            <a:ext cx="3017520" cy="1737360"/>
           </a:xfrm>
           <a:prstGeom prst="rect">
             <a:avLst/>
@@ -9756,7 +10470,7 @@
           <a:lstStyle/>
           <a:p>
             <a:pPr>
-              <a:defRPr sz="1000" b="1">
+              <a:defRPr sz="1100" b="1">
                 <a:solidFill>
                   <a:srgbClr val="64748B"/>
                 </a:solidFill>
@@ -9769,7 +10483,7 @@
           </a:p>
           <a:p>
             <a:pPr>
-              <a:defRPr sz="1800" b="1">
+              <a:defRPr sz="2200" b="1">
                 <a:solidFill>
                   <a:srgbClr val="06B6D4"/>
                 </a:solidFill>
@@ -9782,7 +10496,7 @@
           </a:p>
           <a:p>
             <a:pPr>
-              <a:defRPr sz="1100">
+              <a:defRPr sz="1200">
                 <a:solidFill>
                   <a:srgbClr val="94A3B8"/>
                 </a:solidFill>
@@ -9795,7 +10509,7 @@
           </a:p>
           <a:p>
             <a:pPr>
-              <a:defRPr sz="950" b="1">
+              <a:defRPr sz="1050" b="1">
                 <a:solidFill>
                   <a:srgbClr val="FFFFFF"/>
                 </a:solidFill>
@@ -9816,18 +10530,18 @@
         </p:nvSpPr>
         <p:spPr>
           <a:xfrm>
-            <a:off x="8961120" y="1737360"/>
-            <a:ext cx="2468880" cy="1920240"/>
+            <a:off x="731520" y="3977639"/>
+            <a:ext cx="10698480" cy="1645920"/>
           </a:xfrm>
           <a:prstGeom prst="roundRect">
             <a:avLst/>
           </a:prstGeom>
           <a:solidFill>
-            <a:srgbClr val="0E172E"/>
+            <a:srgbClr val="132247"/>
           </a:solidFill>
           <a:ln w="12700">
             <a:solidFill>
-              <a:srgbClr val="1E293B"/>
+              <a:srgbClr val="F59E0B"/>
             </a:solidFill>
           </a:ln>
         </p:spPr>
@@ -9861,8 +10575,8 @@
         </p:nvSpPr>
         <p:spPr>
           <a:xfrm>
-            <a:off x="9125712" y="1874520"/>
-            <a:ext cx="2139696" cy="1920240"/>
+            <a:off x="1005840" y="4114800"/>
+            <a:ext cx="10149840" cy="1371600"/>
           </a:xfrm>
           <a:prstGeom prst="rect">
             <a:avLst/>
@@ -9876,20 +10590,7 @@
           <a:lstStyle/>
           <a:p>
             <a:pPr>
-              <a:defRPr sz="1000" b="1">
-                <a:solidFill>
-                  <a:srgbClr val="64748B"/>
-                </a:solidFill>
-                <a:latin typeface="Segoe UI"/>
-              </a:defRPr>
-            </a:pPr>
-            <a:r>
-              <a:t>AI INFERENCE ROI</a:t>
-            </a:r>
-          </a:p>
-          <a:p>
-            <a:pPr>
-              <a:defRPr sz="1800" b="1">
+              <a:defRPr sz="1100" b="1">
                 <a:solidFill>
                   <a:srgbClr val="F59E0B"/>
                 </a:solidFill>
@@ -9897,25 +10598,12 @@
               </a:defRPr>
             </a:pPr>
             <a:r>
-              <a:t>IRO: 2,920x</a:t>
-            </a:r>
-          </a:p>
-          <a:p>
-            <a:pPr>
-              <a:defRPr sz="1100">
-                <a:solidFill>
-                  <a:srgbClr val="94A3B8"/>
-                </a:solidFill>
-                <a:latin typeface="Segoe UI"/>
-              </a:defRPr>
-            </a:pPr>
-            <a:r>
-              <a:t>Baseline: 0x (No AI)</a:t>
-            </a:r>
-          </a:p>
-          <a:p>
-            <a:pPr>
-              <a:defRPr sz="950" b="1">
+              <a:t>WORKLOAD DISTRIBUTION &amp; AI INFERENCE ROI</a:t>
+            </a:r>
+          </a:p>
+          <a:p>
+            <a:pPr>
+              <a:defRPr sz="1000">
                 <a:solidFill>
                   <a:srgbClr val="FFFFFF"/>
                 </a:solidFill>
@@ -9923,66 +10611,29 @@
               </a:defRPr>
             </a:pPr>
             <a:r>
-              <a:t>₹28.56 ($0.336) Total AI Cost</a:t>
-            </a:r>
-          </a:p>
-        </p:txBody>
-      </p:sp>
-      <p:sp>
-        <p:nvSpPr>
-          <p:cNvPr id="14" name="Rounded Rectangle 13"/>
-          <p:cNvSpPr/>
-          <p:nvPr/>
-        </p:nvSpPr>
-        <p:spPr>
-          <a:xfrm>
-            <a:off x="731520" y="3931920"/>
-            <a:ext cx="10698480" cy="1645920"/>
-          </a:xfrm>
-          <a:prstGeom prst="roundRect">
-            <a:avLst/>
-          </a:prstGeom>
-          <a:solidFill>
-            <a:srgbClr val="132247"/>
-          </a:solidFill>
-          <a:ln w="12700">
-            <a:solidFill>
-              <a:srgbClr val="1E293B"/>
-            </a:solidFill>
-          </a:ln>
-        </p:spPr>
-        <p:style>
-          <a:lnRef idx="1">
-            <a:schemeClr val="accent1"/>
-          </a:lnRef>
-          <a:fillRef idx="3">
-            <a:schemeClr val="accent1"/>
-          </a:fillRef>
-          <a:effectRef idx="2">
-            <a:schemeClr val="accent1"/>
-          </a:effectRef>
-          <a:fontRef idx="minor">
-            <a:schemeClr val="lt1"/>
-          </a:fontRef>
-        </p:style>
-        <p:txBody>
-          <a:bodyPr rtlCol="0" anchor="ctr"/>
-          <a:lstStyle/>
-          <a:p>
-            <a:pPr algn="ctr"/>
-          </a:p>
-        </p:txBody>
-      </p:sp>
-      <p:sp>
-        <p:nvSpPr>
-          <p:cNvPr id="15" name="TextBox 14"/>
+              <a:t>• 68 Deterministic Cases (Tier 1): Resolved instantly with ZERO AI token overhead (&lt;1ms).</a:t>
+            </a:r>
+            <a:br/>
+            <a:r>
+              <a:t>• 32 Specialist Agent Cases (Tier 3): Deep investigation for genuine multi-variable ambiguity.</a:t>
+            </a:r>
+            <a:br/>
+            <a:r>
+              <a:t>• ₹28.56 ($0.336 USD) Total AI Cost  →  2,920x ROI Multiplier (₹2,920 revenue recovered per ₹1 spent on AI).</a:t>
+            </a:r>
+          </a:p>
+        </p:txBody>
+      </p:sp>
+      <p:sp>
+        <p:nvSpPr>
+          <p:cNvPr id="14" name="TextBox 13"/>
           <p:cNvSpPr txBox="1"/>
           <p:nvPr/>
         </p:nvSpPr>
         <p:spPr>
           <a:xfrm>
-            <a:off x="1005840" y="4069080"/>
-            <a:ext cx="10149840" cy="1371600"/>
+            <a:off x="731520" y="5760720"/>
+            <a:ext cx="10698480" cy="365760"/>
           </a:xfrm>
           <a:prstGeom prst="rect">
             <a:avLst/>
@@ -9996,63 +10647,6 @@
           <a:lstStyle/>
           <a:p>
             <a:pPr>
-              <a:defRPr sz="1100" b="1">
-                <a:solidFill>
-                  <a:srgbClr val="06B6D4"/>
-                </a:solidFill>
-                <a:latin typeface="Segoe UI"/>
-              </a:defRPr>
-            </a:pPr>
-            <a:r>
-              <a:t>BREAKDOWN BY TIER &amp; EXECUTION SAFETY (N=100 TRANSACTIONS)</a:t>
-            </a:r>
-          </a:p>
-          <a:p>
-            <a:pPr>
-              <a:defRPr sz="1000">
-                <a:solidFill>
-                  <a:srgbClr val="94A3B8"/>
-                </a:solidFill>
-                <a:latin typeface="Segoe UI"/>
-              </a:defRPr>
-            </a:pPr>
-            <a:r>
-              <a:t>• Tier Distribution: 68 Tier-1 Deterministic (0 token overhead) + 32 Tier-3 Specialist Agent dispatches.</a:t>
-            </a:r>
-            <a:br/>
-            <a:r>
-              <a:t>• Token Consumption: 20,800 total tokens (14.4k prompt / 6.4k completion) across 32 complex dispatches.</a:t>
-            </a:r>
-            <a:br/>
-            <a:r>
-              <a:t>• Safety Invariant: Zero double debits, zero policy violations, zero unauthorized attempts executed.</a:t>
-            </a:r>
-          </a:p>
-        </p:txBody>
-      </p:sp>
-      <p:sp>
-        <p:nvSpPr>
-          <p:cNvPr id="16" name="TextBox 15"/>
-          <p:cNvSpPr txBox="1"/>
-          <p:nvPr/>
-        </p:nvSpPr>
-        <p:spPr>
-          <a:xfrm>
-            <a:off x="731520" y="5760720"/>
-            <a:ext cx="10698480" cy="365760"/>
-          </a:xfrm>
-          <a:prstGeom prst="rect">
-            <a:avLst/>
-          </a:prstGeom>
-          <a:noFill/>
-        </p:spPr>
-        <p:txBody>
-          <a:bodyPr wrap="none">
-            <a:spAutoFit/>
-          </a:bodyPr>
-          <a:lstStyle/>
-          <a:p>
-            <a:pPr>
               <a:defRPr sz="900" i="1">
                 <a:solidFill>
                   <a:srgbClr val="64748B"/>
@@ -10061,7 +10655,7 @@
               </a:defRPr>
             </a:pPr>
             <a:r>
-              <a:t>DISCLAIMER: Evaluated across 100 controlled synthetic payment scenarios with realistic distributions. These are synthetic benchmark results, not real Razorpay transaction outcomes.</a:t>
+              <a:t>DISCLAIMER: Controlled 100-case synthetic benchmark with realistic distributions. Not real Razorpay production transaction data.</a:t>
             </a:r>
           </a:p>
         </p:txBody>
@@ -10158,7 +10752,7 @@
               </a:defRPr>
             </a:pPr>
             <a:r>
-              <a:t>08. KEY TAKEAWAYS</a:t>
+              <a:t>08. MARKET OPPORTUNITY &amp; MONETIZATION</a:t>
             </a:r>
           </a:p>
         </p:txBody>
@@ -10194,7 +10788,7 @@
               </a:defRPr>
             </a:pPr>
             <a:r>
-              <a:t>Core Learnings: Payment Recovery Beyond AI</a:t>
+              <a:t>Business Model: Autonomous Payment Operations</a:t>
             </a:r>
           </a:p>
         </p:txBody>
@@ -10230,7 +10824,7 @@
               </a:defRPr>
             </a:pPr>
             <a:r>
-              <a:t>Payment recovery is fundamentally a systems engineering challenge, and only sometimes an AI challenge.</a:t>
+              <a:t>Positioning IRO as enterprise B2B fintech infrastructure for banks, PSPs, and high-volume merchants.</a:t>
             </a:r>
           </a:p>
         </p:txBody>
@@ -10244,7 +10838,7 @@
         <p:spPr>
           <a:xfrm>
             <a:off x="731520" y="1737360"/>
-            <a:ext cx="1993392" cy="2377440"/>
+            <a:ext cx="3383280" cy="2011680"/>
           </a:xfrm>
           <a:prstGeom prst="roundRect">
             <a:avLst/>
@@ -10288,8 +10882,8 @@
         </p:nvSpPr>
         <p:spPr>
           <a:xfrm>
-            <a:off x="868680" y="1920240"/>
-            <a:ext cx="1719072" cy="2011680"/>
+            <a:off x="896112" y="1901952"/>
+            <a:ext cx="3054096" cy="1737360"/>
           </a:xfrm>
           <a:prstGeom prst="rect">
             <a:avLst/>
@@ -10297,7 +10891,7 @@
           <a:noFill/>
         </p:spPr>
         <p:txBody>
-          <a:bodyPr wrap="square">
+          <a:bodyPr wrap="none">
             <a:spAutoFit/>
           </a:bodyPr>
           <a:lstStyle/>
@@ -10311,7 +10905,20 @@
               </a:defRPr>
             </a:pPr>
             <a:r>
-              <a:t>A RELIABILITY PROBLEM</a:t>
+              <a:t>1. PLATFORM LICENSE</a:t>
+            </a:r>
+          </a:p>
+          <a:p>
+            <a:pPr>
+              <a:defRPr sz="1300" b="1">
+                <a:solidFill>
+                  <a:srgbClr val="FFFFFF"/>
+                </a:solidFill>
+                <a:latin typeface="Segoe UI"/>
+              </a:defRPr>
+            </a:pPr>
+            <a:r>
+              <a:t>Annual Enterprise Core</a:t>
             </a:r>
           </a:p>
           <a:p>
@@ -10325,7 +10932,7 @@
               </a:defRPr>
             </a:pPr>
             <a:r>
-              <a:t>Resilient FSM state machines, dead letter queues, and bounded retry intervals.</a:t>
+              <a:t>License for core orchestrator, policy engine, dashboard console, and compliance ledger.</a:t>
             </a:r>
           </a:p>
         </p:txBody>
@@ -10338,8 +10945,8 @@
         </p:nvSpPr>
         <p:spPr>
           <a:xfrm>
-            <a:off x="2907792" y="1737360"/>
-            <a:ext cx="1993392" cy="2377440"/>
+            <a:off x="4389120" y="1737360"/>
+            <a:ext cx="3383280" cy="2011680"/>
           </a:xfrm>
           <a:prstGeom prst="roundRect">
             <a:avLst/>
@@ -10383,8 +10990,8 @@
         </p:nvSpPr>
         <p:spPr>
           <a:xfrm>
-            <a:off x="3044952" y="1920240"/>
-            <a:ext cx="1719072" cy="2011680"/>
+            <a:off x="4553712" y="1901952"/>
+            <a:ext cx="3054096" cy="1737360"/>
           </a:xfrm>
           <a:prstGeom prst="rect">
             <a:avLst/>
@@ -10392,7 +10999,7 @@
           <a:noFill/>
         </p:spPr>
         <p:txBody>
-          <a:bodyPr wrap="square">
+          <a:bodyPr wrap="none">
             <a:spAutoFit/>
           </a:bodyPr>
           <a:lstStyle/>
@@ -10406,7 +11013,20 @@
               </a:defRPr>
             </a:pPr>
             <a:r>
-              <a:t>A CONCURRENCY PROBLEM</a:t>
+              <a:t>2. USAGE-BASED TIERS</a:t>
+            </a:r>
+          </a:p>
+          <a:p>
+            <a:pPr>
+              <a:defRPr sz="1300" b="1">
+                <a:solidFill>
+                  <a:srgbClr val="FFFFFF"/>
+                </a:solidFill>
+                <a:latin typeface="Segoe UI"/>
+              </a:defRPr>
+            </a:pPr>
+            <a:r>
+              <a:t>Per-Operation Pricing</a:t>
             </a:r>
           </a:p>
           <a:p>
@@ -10420,7 +11040,7 @@
               </a:defRPr>
             </a:pPr>
             <a:r>
-              <a:t>Distributed Redis locking (SET NX EX) and durable relational idempotency barriers.</a:t>
+              <a:t>Metered fee per ambiguous recovery case or automated payment operation processed.</a:t>
             </a:r>
           </a:p>
         </p:txBody>
@@ -10433,8 +11053,8 @@
         </p:nvSpPr>
         <p:spPr>
           <a:xfrm>
-            <a:off x="5084064" y="1737360"/>
-            <a:ext cx="1993392" cy="2377440"/>
+            <a:off x="8046720" y="1737360"/>
+            <a:ext cx="3383280" cy="2011680"/>
           </a:xfrm>
           <a:prstGeom prst="roundRect">
             <a:avLst/>
@@ -10478,8 +11098,8 @@
         </p:nvSpPr>
         <p:spPr>
           <a:xfrm>
-            <a:off x="5221224" y="1920240"/>
-            <a:ext cx="1719072" cy="2011680"/>
+            <a:off x="8211312" y="1901952"/>
+            <a:ext cx="3054096" cy="1737360"/>
           </a:xfrm>
           <a:prstGeom prst="rect">
             <a:avLst/>
@@ -10487,7 +11107,7 @@
           <a:noFill/>
         </p:spPr>
         <p:txBody>
-          <a:bodyPr wrap="square">
+          <a:bodyPr wrap="none">
             <a:spAutoFit/>
           </a:bodyPr>
           <a:lstStyle/>
@@ -10495,13 +11115,26 @@
             <a:pPr>
               <a:defRPr sz="1100" b="1">
                 <a:solidFill>
-                  <a:srgbClr val="F59E0B"/>
-                </a:solidFill>
-                <a:latin typeface="Segoe UI"/>
-              </a:defRPr>
-            </a:pPr>
-            <a:r>
-              <a:t>A POLICY PROBLEM</a:t>
+                  <a:srgbClr val="2563EB"/>
+                </a:solidFill>
+                <a:latin typeface="Segoe UI"/>
+              </a:defRPr>
+            </a:pPr>
+            <a:r>
+              <a:t>3. ENTERPRISE VPC</a:t>
+            </a:r>
+          </a:p>
+          <a:p>
+            <a:pPr>
+              <a:defRPr sz="1300" b="1">
+                <a:solidFill>
+                  <a:srgbClr val="FFFFFF"/>
+                </a:solidFill>
+                <a:latin typeface="Segoe UI"/>
+              </a:defRPr>
+            </a:pPr>
+            <a:r>
+              <a:t>Private Infrastructure</a:t>
             </a:r>
           </a:p>
           <a:p>
@@ -10515,7 +11148,7 @@
               </a:defRPr>
             </a:pPr>
             <a:r>
-              <a:t>Deterministic financial policy guards, retry thresholds, and regulatory compliance boundaries.</a:t>
+              <a:t>Custom bank gateway integrations, private cloud VPC deployment, dedicated SLA.</a:t>
             </a:r>
           </a:p>
         </p:txBody>
@@ -10528,18 +11161,18 @@
         </p:nvSpPr>
         <p:spPr>
           <a:xfrm>
-            <a:off x="7260336" y="1737360"/>
-            <a:ext cx="1993392" cy="2377440"/>
+            <a:off x="731520" y="3977639"/>
+            <a:ext cx="10698480" cy="2103120"/>
           </a:xfrm>
           <a:prstGeom prst="roundRect">
             <a:avLst/>
           </a:prstGeom>
           <a:solidFill>
-            <a:srgbClr val="0E172E"/>
+            <a:srgbClr val="132247"/>
           </a:solidFill>
           <a:ln w="12700">
             <a:solidFill>
-              <a:srgbClr val="1E293B"/>
+              <a:srgbClr val="3B82F6"/>
             </a:solidFill>
           </a:ln>
         </p:spPr>
@@ -10573,198 +11206,8 @@
         </p:nvSpPr>
         <p:spPr>
           <a:xfrm>
-            <a:off x="7397496" y="1920240"/>
-            <a:ext cx="1719072" cy="2011680"/>
-          </a:xfrm>
-          <a:prstGeom prst="rect">
-            <a:avLst/>
-          </a:prstGeom>
-          <a:noFill/>
-        </p:spPr>
-        <p:txBody>
-          <a:bodyPr wrap="square">
-            <a:spAutoFit/>
-          </a:bodyPr>
-          <a:lstStyle/>
-          <a:p>
-            <a:pPr>
-              <a:defRPr sz="1100" b="1">
-                <a:solidFill>
-                  <a:srgbClr val="EF4444"/>
-                </a:solidFill>
-                <a:latin typeface="Segoe UI"/>
-              </a:defRPr>
-            </a:pPr>
-            <a:r>
-              <a:t>A COST PROBLEM</a:t>
-            </a:r>
-          </a:p>
-          <a:p>
-            <a:br/>
-            <a:pPr>
-              <a:defRPr sz="950">
-                <a:solidFill>
-                  <a:srgbClr val="94A3B8"/>
-                </a:solidFill>
-                <a:latin typeface="Segoe UI"/>
-              </a:defRPr>
-            </a:pPr>
-            <a:r>
-              <a:t>Right-sized model routing, L7 load balancing, and fast deterministic bypass for 68% of cases.</a:t>
-            </a:r>
-          </a:p>
-        </p:txBody>
-      </p:sp>
-      <p:sp>
-        <p:nvSpPr>
-          <p:cNvPr id="14" name="Rounded Rectangle 13"/>
-          <p:cNvSpPr/>
-          <p:nvPr/>
-        </p:nvSpPr>
-        <p:spPr>
-          <a:xfrm>
-            <a:off x="9436608" y="1737360"/>
-            <a:ext cx="1993392" cy="2377440"/>
-          </a:xfrm>
-          <a:prstGeom prst="roundRect">
-            <a:avLst/>
-          </a:prstGeom>
-          <a:solidFill>
-            <a:srgbClr val="0E172E"/>
-          </a:solidFill>
-          <a:ln w="12700">
-            <a:solidFill>
-              <a:srgbClr val="1E293B"/>
-            </a:solidFill>
-          </a:ln>
-        </p:spPr>
-        <p:style>
-          <a:lnRef idx="1">
-            <a:schemeClr val="accent1"/>
-          </a:lnRef>
-          <a:fillRef idx="3">
-            <a:schemeClr val="accent1"/>
-          </a:fillRef>
-          <a:effectRef idx="2">
-            <a:schemeClr val="accent1"/>
-          </a:effectRef>
-          <a:fontRef idx="minor">
-            <a:schemeClr val="lt1"/>
-          </a:fontRef>
-        </p:style>
-        <p:txBody>
-          <a:bodyPr rtlCol="0" anchor="ctr"/>
-          <a:lstStyle/>
-          <a:p>
-            <a:pPr algn="ctr"/>
-          </a:p>
-        </p:txBody>
-      </p:sp>
-      <p:sp>
-        <p:nvSpPr>
-          <p:cNvPr id="15" name="TextBox 14"/>
-          <p:cNvSpPr txBox="1"/>
-          <p:nvPr/>
-        </p:nvSpPr>
-        <p:spPr>
-          <a:xfrm>
-            <a:off x="9573768" y="1920240"/>
-            <a:ext cx="1719072" cy="2011680"/>
-          </a:xfrm>
-          <a:prstGeom prst="rect">
-            <a:avLst/>
-          </a:prstGeom>
-          <a:noFill/>
-        </p:spPr>
-        <p:txBody>
-          <a:bodyPr wrap="square">
-            <a:spAutoFit/>
-          </a:bodyPr>
-          <a:lstStyle/>
-          <a:p>
-            <a:pPr>
-              <a:defRPr sz="1100" b="1">
-                <a:solidFill>
-                  <a:srgbClr val="10B981"/>
-                </a:solidFill>
-                <a:latin typeface="Segoe UI"/>
-              </a:defRPr>
-            </a:pPr>
-            <a:r>
-              <a:t>AND ONLY SOMETIMES...</a:t>
-            </a:r>
-          </a:p>
-          <a:p>
-            <a:br/>
-            <a:pPr>
-              <a:defRPr sz="950">
-                <a:solidFill>
-                  <a:srgbClr val="94A3B8"/>
-                </a:solidFill>
-                <a:latin typeface="Segoe UI"/>
-              </a:defRPr>
-            </a:pPr>
-            <a:r>
-              <a:t>An AI problem. Introduced strictly when recovery decisions become ambiguous.</a:t>
-            </a:r>
-          </a:p>
-        </p:txBody>
-      </p:sp>
-      <p:sp>
-        <p:nvSpPr>
-          <p:cNvPr id="16" name="Rounded Rectangle 15"/>
-          <p:cNvSpPr/>
-          <p:nvPr/>
-        </p:nvSpPr>
-        <p:spPr>
-          <a:xfrm>
-            <a:off x="731520" y="4389120"/>
-            <a:ext cx="10698480" cy="1828800"/>
-          </a:xfrm>
-          <a:prstGeom prst="roundRect">
-            <a:avLst/>
-          </a:prstGeom>
-          <a:solidFill>
-            <a:srgbClr val="132247"/>
-          </a:solidFill>
-          <a:ln w="12700">
-            <a:solidFill>
-              <a:srgbClr val="2563EB"/>
-            </a:solidFill>
-          </a:ln>
-        </p:spPr>
-        <p:style>
-          <a:lnRef idx="1">
-            <a:schemeClr val="accent1"/>
-          </a:lnRef>
-          <a:fillRef idx="3">
-            <a:schemeClr val="accent1"/>
-          </a:fillRef>
-          <a:effectRef idx="2">
-            <a:schemeClr val="accent1"/>
-          </a:effectRef>
-          <a:fontRef idx="minor">
-            <a:schemeClr val="lt1"/>
-          </a:fontRef>
-        </p:style>
-        <p:txBody>
-          <a:bodyPr rtlCol="0" anchor="ctr"/>
-          <a:lstStyle/>
-          <a:p>
-            <a:pPr algn="ctr"/>
-          </a:p>
-        </p:txBody>
-      </p:sp>
-      <p:sp>
-        <p:nvSpPr>
-          <p:cNvPr id="17" name="TextBox 16"/>
-          <p:cNvSpPr txBox="1"/>
-          <p:nvPr/>
-        </p:nvSpPr>
-        <p:spPr>
-          <a:xfrm>
-            <a:off x="1097280" y="4572000"/>
-            <a:ext cx="9966960" cy="1463040"/>
+            <a:off x="1005840" y="4114800"/>
+            <a:ext cx="10149840" cy="1828800"/>
           </a:xfrm>
           <a:prstGeom prst="rect">
             <a:avLst/>
@@ -10778,7 +11221,20 @@
           <a:lstStyle/>
           <a:p>
             <a:pPr>
-              <a:defRPr sz="1600" i="1">
+              <a:defRPr sz="1100" b="1">
+                <a:solidFill>
+                  <a:srgbClr val="06B6D4"/>
+                </a:solidFill>
+                <a:latin typeface="Segoe UI"/>
+              </a:defRPr>
+            </a:pPr>
+            <a:r>
+              <a:t>CATEGORY EVOLUTION: FROM RECOVERY TO FULL PAYMENT OPERATIONS</a:t>
+            </a:r>
+          </a:p>
+          <a:p>
+            <a:pPr>
+              <a:defRPr sz="950">
                 <a:solidFill>
                   <a:srgbClr val="94A3B8"/>
                 </a:solidFill>
@@ -10786,20 +11242,28 @@
               </a:defRPr>
             </a:pPr>
             <a:r>
-              <a:t>"We didn't build an AI that controls payments."</a:t>
-            </a:r>
-          </a:p>
-          <a:p>
-            <a:pPr>
-              <a:defRPr sz="2400" b="1">
-                <a:solidFill>
-                  <a:srgbClr val="FFFFFF"/>
-                </a:solidFill>
-                <a:latin typeface="Segoe UI"/>
-              </a:defRPr>
-            </a:pPr>
-            <a:r>
-              <a:t>We built a payment recovery system that knows when AI is worth using.</a:t>
+              <a:t>• TODAY (Built &amp; Verified): Failure Investigation  →  Recovery Orchestration  →  Outcome Verification</a:t>
+            </a:r>
+            <a:br/>
+            <a:br/>
+            <a:r>
+              <a:t>• FUTURE EXPANSION ROADMAP:</a:t>
+            </a:r>
+            <a:br/>
+            <a:r>
+              <a:t>  - Autonomous Reconciliation: Resolves in-flight timeouts &amp; bank pending states without human tickets</a:t>
+            </a:r>
+            <a:br/>
+            <a:r>
+              <a:t>  - Dynamic Route Health Balancing: Preemptively shifts traffic away from failing banking rails</a:t>
+            </a:r>
+            <a:br/>
+            <a:r>
+              <a:t>  - Merchant SLA Guardrails: Automatically tunes retry limits to merchant margin &amp; risk thresholds</a:t>
+            </a:r>
+            <a:br/>
+            <a:r>
+              <a:t>  - Operational Escalation: Human-in-the-loop copilot for regulatory reviews and high-value chargebacks</a:t>
             </a:r>
           </a:p>
         </p:txBody>
